--- a/testcases/charts-fills.pptx
+++ b/testcases/charts-fills.pptx
@@ -7,6 +7,7 @@
   <p:sldIdLst>
     <p:sldId id="256" r:id="rId2"/>
     <p:sldId id="257" r:id="rId3"/>
+    <p:sldId id="258" r:id="rId4"/>
   </p:sldIdLst>
   <p:sldSz cx="12192000" cy="6858000"/>
   <p:notesSz cx="6858000" cy="9144000"/>
@@ -196,7 +197,7 @@
           </c:val>
           <c:extLst>
             <c:ext xmlns:c16="http://schemas.microsoft.com/office/drawing/2014/chart" uri="{C3380CC4-5D6E-409C-BE32-E72D297353CC}">
-              <c16:uniqueId val="{00000000-D674-43FE-B9E5-A882F3E8DC36}"/>
+              <c16:uniqueId val="{00000000-48A2-493E-9397-526F2F4E477C}"/>
             </c:ext>
           </c:extLst>
         </c:ser>
@@ -267,7 +268,7 @@
           </c:val>
           <c:extLst>
             <c:ext xmlns:c16="http://schemas.microsoft.com/office/drawing/2014/chart" uri="{C3380CC4-5D6E-409C-BE32-E72D297353CC}">
-              <c16:uniqueId val="{00000001-D674-43FE-B9E5-A882F3E8DC36}"/>
+              <c16:uniqueId val="{00000001-48A2-493E-9397-526F2F4E477C}"/>
             </c:ext>
           </c:extLst>
         </c:ser>
@@ -338,7 +339,7 @@
           </c:val>
           <c:extLst>
             <c:ext xmlns:c16="http://schemas.microsoft.com/office/drawing/2014/chart" uri="{C3380CC4-5D6E-409C-BE32-E72D297353CC}">
-              <c16:uniqueId val="{00000002-D674-43FE-B9E5-A882F3E8DC36}"/>
+              <c16:uniqueId val="{00000002-48A2-493E-9397-526F2F4E477C}"/>
             </c:ext>
           </c:extLst>
         </c:ser>
@@ -352,11 +353,11 @@
         </c:dLbls>
         <c:gapWidth val="219"/>
         <c:overlap val="-27"/>
-        <c:axId val="1428807792"/>
-        <c:axId val="1428810192"/>
+        <c:axId val="205483039"/>
+        <c:axId val="205476319"/>
       </c:barChart>
       <c:catAx>
-        <c:axId val="1428807792"/>
+        <c:axId val="205483039"/>
         <c:scaling>
           <c:orientation val="minMax"/>
         </c:scaling>
@@ -399,7 +400,7 @@
             <a:endParaRPr lang="zh-CN"/>
           </a:p>
         </c:txPr>
-        <c:crossAx val="1428810192"/>
+        <c:crossAx val="205476319"/>
         <c:crosses val="autoZero"/>
         <c:auto val="1"/>
         <c:lblAlgn val="ctr"/>
@@ -407,7 +408,7 @@
         <c:noMultiLvlLbl val="0"/>
       </c:catAx>
       <c:valAx>
-        <c:axId val="1428810192"/>
+        <c:axId val="205476319"/>
         <c:scaling>
           <c:orientation val="minMax"/>
         </c:scaling>
@@ -458,7 +459,7 @@
             <a:endParaRPr lang="zh-CN"/>
           </a:p>
         </c:txPr>
-        <c:crossAx val="1428807792"/>
+        <c:crossAx val="205483039"/>
         <c:crosses val="autoZero"/>
         <c:crossBetween val="between"/>
       </c:valAx>
@@ -631,7 +632,7 @@
           <c:smooth val="0"/>
           <c:extLst>
             <c:ext xmlns:c16="http://schemas.microsoft.com/office/drawing/2014/chart" uri="{C3380CC4-5D6E-409C-BE32-E72D297353CC}">
-              <c16:uniqueId val="{00000000-6490-4D9A-9B6F-C18CDB41FF1F}"/>
+              <c16:uniqueId val="{00000000-BDC7-4BC0-8152-28E2ABD6C9F1}"/>
             </c:ext>
           </c:extLst>
         </c:ser>
@@ -705,7 +706,7 @@
           <c:smooth val="0"/>
           <c:extLst>
             <c:ext xmlns:c16="http://schemas.microsoft.com/office/drawing/2014/chart" uri="{C3380CC4-5D6E-409C-BE32-E72D297353CC}">
-              <c16:uniqueId val="{00000001-6490-4D9A-9B6F-C18CDB41FF1F}"/>
+              <c16:uniqueId val="{00000001-BDC7-4BC0-8152-28E2ABD6C9F1}"/>
             </c:ext>
           </c:extLst>
         </c:ser>
@@ -779,7 +780,7 @@
           <c:smooth val="0"/>
           <c:extLst>
             <c:ext xmlns:c16="http://schemas.microsoft.com/office/drawing/2014/chart" uri="{C3380CC4-5D6E-409C-BE32-E72D297353CC}">
-              <c16:uniqueId val="{00000002-6490-4D9A-9B6F-C18CDB41FF1F}"/>
+              <c16:uniqueId val="{00000002-BDC7-4BC0-8152-28E2ABD6C9F1}"/>
             </c:ext>
           </c:extLst>
         </c:ser>
@@ -792,11 +793,11 @@
           <c:showBubbleSize val="0"/>
         </c:dLbls>
         <c:smooth val="0"/>
-        <c:axId val="23026831"/>
-        <c:axId val="23029231"/>
+        <c:axId val="337030303"/>
+        <c:axId val="337033663"/>
       </c:lineChart>
       <c:catAx>
-        <c:axId val="23026831"/>
+        <c:axId val="337030303"/>
         <c:scaling>
           <c:orientation val="minMax"/>
         </c:scaling>
@@ -839,7 +840,7 @@
             <a:endParaRPr lang="zh-CN"/>
           </a:p>
         </c:txPr>
-        <c:crossAx val="23029231"/>
+        <c:crossAx val="337033663"/>
         <c:crosses val="autoZero"/>
         <c:auto val="1"/>
         <c:lblAlgn val="ctr"/>
@@ -847,7 +848,7 @@
         <c:noMultiLvlLbl val="0"/>
       </c:catAx>
       <c:valAx>
-        <c:axId val="23029231"/>
+        <c:axId val="337033663"/>
         <c:scaling>
           <c:orientation val="minMax"/>
         </c:scaling>
@@ -898,7 +899,7 @@
             <a:endParaRPr lang="zh-CN"/>
           </a:p>
         </c:txPr>
-        <c:crossAx val="23026831"/>
+        <c:crossAx val="337030303"/>
         <c:crosses val="autoZero"/>
         <c:crossBetween val="between"/>
       </c:valAx>
@@ -1083,7 +1084,7 @@
           <c:smooth val="0"/>
           <c:extLst>
             <c:ext xmlns:c16="http://schemas.microsoft.com/office/drawing/2014/chart" uri="{C3380CC4-5D6E-409C-BE32-E72D297353CC}">
-              <c16:uniqueId val="{00000000-2CC4-41FC-99F1-F9A639E53D9A}"/>
+              <c16:uniqueId val="{00000000-7B03-4828-80A5-E67075B5CC7D}"/>
             </c:ext>
           </c:extLst>
         </c:ser>
@@ -1095,11 +1096,11 @@
           <c:showPercent val="0"/>
           <c:showBubbleSize val="0"/>
         </c:dLbls>
-        <c:axId val="26744207"/>
-        <c:axId val="26567359"/>
+        <c:axId val="1680188480"/>
+        <c:axId val="344193311"/>
       </c:scatterChart>
       <c:valAx>
-        <c:axId val="26744207"/>
+        <c:axId val="1680188480"/>
         <c:scaling>
           <c:orientation val="minMax"/>
         </c:scaling>
@@ -1156,12 +1157,12 @@
             <a:endParaRPr lang="zh-CN"/>
           </a:p>
         </c:txPr>
-        <c:crossAx val="26567359"/>
+        <c:crossAx val="344193311"/>
         <c:crosses val="autoZero"/>
         <c:crossBetween val="midCat"/>
       </c:valAx>
       <c:valAx>
-        <c:axId val="26567359"/>
+        <c:axId val="344193311"/>
         <c:scaling>
           <c:orientation val="minMax"/>
         </c:scaling>
@@ -1218,7 +1219,7 @@
             <a:endParaRPr lang="zh-CN"/>
           </a:p>
         </c:txPr>
-        <c:crossAx val="26744207"/>
+        <c:crossAx val="1680188480"/>
         <c:crosses val="autoZero"/>
         <c:crossBetween val="midCat"/>
       </c:valAx>
@@ -1226,6 +1227,689 @@
         <a:solidFill>
           <a:srgbClr val="EBF1DE"/>
         </a:solidFill>
+        <a:ln>
+          <a:noFill/>
+        </a:ln>
+        <a:effectLst/>
+      </c:spPr>
+    </c:plotArea>
+    <c:legend>
+      <c:legendPos val="b"/>
+      <c:overlay val="0"/>
+      <c:spPr>
+        <a:noFill/>
+        <a:ln>
+          <a:noFill/>
+        </a:ln>
+        <a:effectLst/>
+      </c:spPr>
+      <c:txPr>
+        <a:bodyPr rot="0" spcFirstLastPara="1" vertOverflow="ellipsis" vert="horz" wrap="square" anchor="ctr" anchorCtr="1"/>
+        <a:lstStyle/>
+        <a:p>
+          <a:pPr>
+            <a:defRPr sz="1197" b="0" i="0" u="none" strike="noStrike" kern="1200" baseline="0">
+              <a:solidFill>
+                <a:schemeClr val="tx1">
+                  <a:lumMod val="65000"/>
+                  <a:lumOff val="35000"/>
+                </a:schemeClr>
+              </a:solidFill>
+              <a:latin typeface="+mn-lt"/>
+              <a:ea typeface="+mn-ea"/>
+              <a:cs typeface="+mn-cs"/>
+            </a:defRPr>
+          </a:pPr>
+          <a:endParaRPr lang="zh-CN"/>
+        </a:p>
+      </c:txPr>
+    </c:legend>
+    <c:plotVisOnly val="1"/>
+    <c:dispBlanksAs val="gap"/>
+    <c:extLst>
+      <c:ext xmlns:c16r3="http://schemas.microsoft.com/office/drawing/2017/03/chart" uri="{56B9EC1D-385E-4148-901F-78D8002777C0}">
+        <c16r3:dataDisplayOptions16>
+          <c16r3:dispNaAsBlank val="1"/>
+        </c16r3:dataDisplayOptions16>
+      </c:ext>
+    </c:extLst>
+    <c:showDLblsOverMax val="0"/>
+  </c:chart>
+  <c:spPr>
+    <a:noFill/>
+    <a:ln>
+      <a:noFill/>
+    </a:ln>
+    <a:effectLst/>
+  </c:spPr>
+  <c:txPr>
+    <a:bodyPr/>
+    <a:lstStyle/>
+    <a:p>
+      <a:pPr>
+        <a:defRPr/>
+      </a:pPr>
+      <a:endParaRPr lang="zh-CN"/>
+    </a:p>
+  </c:txPr>
+  <c:externalData r:id="rId3">
+    <c:autoUpdate val="0"/>
+  </c:externalData>
+</c:chartSpace>
+</file>
+
+<file path=ppt/charts/chart4.xml><?xml version="1.0" encoding="utf-8"?>
+<c:chartSpace xmlns:c="http://schemas.openxmlformats.org/drawingml/2006/chart" xmlns:a="http://schemas.openxmlformats.org/drawingml/2006/main" xmlns:r="http://schemas.openxmlformats.org/officeDocument/2006/relationships" xmlns:c16r2="http://schemas.microsoft.com/office/drawing/2015/06/chart">
+  <c:date1904 val="0"/>
+  <c:lang val="zh-CN"/>
+  <c:roundedCorners val="0"/>
+  <mc:AlternateContent xmlns:mc="http://schemas.openxmlformats.org/markup-compatibility/2006">
+    <mc:Choice xmlns:c14="http://schemas.microsoft.com/office/drawing/2007/8/2/chart" Requires="c14">
+      <c14:style val="102"/>
+    </mc:Choice>
+    <mc:Fallback>
+      <c:style val="2"/>
+    </mc:Fallback>
+  </mc:AlternateContent>
+  <c:chart>
+    <c:autoTitleDeleted val="0"/>
+    <c:plotArea>
+      <c:layout/>
+      <c:barChart>
+        <c:barDir val="col"/>
+        <c:grouping val="clustered"/>
+        <c:varyColors val="0"/>
+        <c:ser>
+          <c:idx val="0"/>
+          <c:order val="0"/>
+          <c:tx>
+            <c:strRef>
+              <c:f>Sheet1!$B$1</c:f>
+              <c:strCache>
+                <c:ptCount val="1"/>
+                <c:pt idx="0">
+                  <c:v>系列 1</c:v>
+                </c:pt>
+              </c:strCache>
+            </c:strRef>
+          </c:tx>
+          <c:spPr>
+            <a:gradFill flip="none" rotWithShape="1">
+              <a:gsLst>
+                <a:gs pos="0">
+                  <a:srgbClr val="1E5AA0"/>
+                </a:gs>
+                <a:gs pos="100000">
+                  <a:srgbClr val="A0D2FA"/>
+                </a:gs>
+              </a:gsLst>
+              <a:lin ang="5400000" scaled="1"/>
+              <a:tileRect/>
+            </a:gradFill>
+            <a:ln>
+              <a:noFill/>
+            </a:ln>
+            <a:effectLst/>
+          </c:spPr>
+          <c:invertIfNegative val="0"/>
+          <c:cat>
+            <c:strRef>
+              <c:f>Sheet1!$A$2:$A$5</c:f>
+              <c:strCache>
+                <c:ptCount val="4"/>
+                <c:pt idx="0">
+                  <c:v>类别 1</c:v>
+                </c:pt>
+                <c:pt idx="1">
+                  <c:v>类别 2</c:v>
+                </c:pt>
+                <c:pt idx="2">
+                  <c:v>类别 3</c:v>
+                </c:pt>
+                <c:pt idx="3">
+                  <c:v>类别 4</c:v>
+                </c:pt>
+              </c:strCache>
+            </c:strRef>
+          </c:cat>
+          <c:val>
+            <c:numRef>
+              <c:f>Sheet1!$B$2:$B$5</c:f>
+              <c:numCache>
+                <c:formatCode>General</c:formatCode>
+                <c:ptCount val="4"/>
+                <c:pt idx="0">
+                  <c:v>4.3</c:v>
+                </c:pt>
+                <c:pt idx="1">
+                  <c:v>2.5</c:v>
+                </c:pt>
+                <c:pt idx="2">
+                  <c:v>3.5</c:v>
+                </c:pt>
+                <c:pt idx="3">
+                  <c:v>4.5</c:v>
+                </c:pt>
+              </c:numCache>
+            </c:numRef>
+          </c:val>
+          <c:extLst>
+            <c:ext xmlns:c16="http://schemas.microsoft.com/office/drawing/2014/chart" uri="{C3380CC4-5D6E-409C-BE32-E72D297353CC}">
+              <c16:uniqueId val="{00000000-6602-490B-A3E7-631712BF51E5}"/>
+            </c:ext>
+          </c:extLst>
+        </c:ser>
+        <c:ser>
+          <c:idx val="1"/>
+          <c:order val="1"/>
+          <c:tx>
+            <c:strRef>
+              <c:f>Sheet1!$C$1</c:f>
+              <c:strCache>
+                <c:ptCount val="1"/>
+                <c:pt idx="0">
+                  <c:v>系列 2</c:v>
+                </c:pt>
+              </c:strCache>
+            </c:strRef>
+          </c:tx>
+          <c:spPr>
+            <a:gradFill flip="none" rotWithShape="1">
+              <a:gsLst>
+                <a:gs pos="0">
+                  <a:srgbClr val="C83C1E"/>
+                </a:gs>
+                <a:gs pos="100000">
+                  <a:srgbClr val="FFC878"/>
+                </a:gs>
+              </a:gsLst>
+              <a:lin ang="0" scaled="1"/>
+              <a:tileRect/>
+            </a:gradFill>
+            <a:ln>
+              <a:noFill/>
+            </a:ln>
+            <a:effectLst/>
+          </c:spPr>
+          <c:invertIfNegative val="0"/>
+          <c:cat>
+            <c:strRef>
+              <c:f>Sheet1!$A$2:$A$5</c:f>
+              <c:strCache>
+                <c:ptCount val="4"/>
+                <c:pt idx="0">
+                  <c:v>类别 1</c:v>
+                </c:pt>
+                <c:pt idx="1">
+                  <c:v>类别 2</c:v>
+                </c:pt>
+                <c:pt idx="2">
+                  <c:v>类别 3</c:v>
+                </c:pt>
+                <c:pt idx="3">
+                  <c:v>类别 4</c:v>
+                </c:pt>
+              </c:strCache>
+            </c:strRef>
+          </c:cat>
+          <c:val>
+            <c:numRef>
+              <c:f>Sheet1!$C$2:$C$5</c:f>
+              <c:numCache>
+                <c:formatCode>General</c:formatCode>
+                <c:ptCount val="4"/>
+                <c:pt idx="0">
+                  <c:v>2.4</c:v>
+                </c:pt>
+                <c:pt idx="1">
+                  <c:v>4.4000000000000004</c:v>
+                </c:pt>
+                <c:pt idx="2">
+                  <c:v>1.8</c:v>
+                </c:pt>
+                <c:pt idx="3">
+                  <c:v>2.8</c:v>
+                </c:pt>
+              </c:numCache>
+            </c:numRef>
+          </c:val>
+          <c:extLst>
+            <c:ext xmlns:c16="http://schemas.microsoft.com/office/drawing/2014/chart" uri="{C3380CC4-5D6E-409C-BE32-E72D297353CC}">
+              <c16:uniqueId val="{00000001-6602-490B-A3E7-631712BF51E5}"/>
+            </c:ext>
+          </c:extLst>
+        </c:ser>
+        <c:ser>
+          <c:idx val="2"/>
+          <c:order val="2"/>
+          <c:tx>
+            <c:strRef>
+              <c:f>Sheet1!$D$1</c:f>
+              <c:strCache>
+                <c:ptCount val="1"/>
+                <c:pt idx="0">
+                  <c:v>系列 3</c:v>
+                </c:pt>
+              </c:strCache>
+            </c:strRef>
+          </c:tx>
+          <c:spPr>
+            <a:solidFill>
+              <a:schemeClr val="accent3"/>
+            </a:solidFill>
+            <a:ln>
+              <a:noFill/>
+            </a:ln>
+            <a:effectLst/>
+          </c:spPr>
+          <c:invertIfNegative val="0"/>
+          <c:cat>
+            <c:strRef>
+              <c:f>Sheet1!$A$2:$A$5</c:f>
+              <c:strCache>
+                <c:ptCount val="4"/>
+                <c:pt idx="0">
+                  <c:v>类别 1</c:v>
+                </c:pt>
+                <c:pt idx="1">
+                  <c:v>类别 2</c:v>
+                </c:pt>
+                <c:pt idx="2">
+                  <c:v>类别 3</c:v>
+                </c:pt>
+                <c:pt idx="3">
+                  <c:v>类别 4</c:v>
+                </c:pt>
+              </c:strCache>
+            </c:strRef>
+          </c:cat>
+          <c:val>
+            <c:numRef>
+              <c:f>Sheet1!$D$2:$D$5</c:f>
+              <c:numCache>
+                <c:formatCode>General</c:formatCode>
+                <c:ptCount val="4"/>
+                <c:pt idx="0">
+                  <c:v>2</c:v>
+                </c:pt>
+                <c:pt idx="1">
+                  <c:v>2</c:v>
+                </c:pt>
+                <c:pt idx="2">
+                  <c:v>3</c:v>
+                </c:pt>
+                <c:pt idx="3">
+                  <c:v>5</c:v>
+                </c:pt>
+              </c:numCache>
+            </c:numRef>
+          </c:val>
+          <c:extLst>
+            <c:ext xmlns:c16="http://schemas.microsoft.com/office/drawing/2014/chart" uri="{C3380CC4-5D6E-409C-BE32-E72D297353CC}">
+              <c16:uniqueId val="{00000002-6602-490B-A3E7-631712BF51E5}"/>
+            </c:ext>
+          </c:extLst>
+        </c:ser>
+        <c:dLbls>
+          <c:showLegendKey val="0"/>
+          <c:showVal val="0"/>
+          <c:showCatName val="0"/>
+          <c:showSerName val="0"/>
+          <c:showPercent val="0"/>
+          <c:showBubbleSize val="0"/>
+        </c:dLbls>
+        <c:gapWidth val="219"/>
+        <c:overlap val="-27"/>
+        <c:axId val="344198111"/>
+        <c:axId val="344198591"/>
+      </c:barChart>
+      <c:catAx>
+        <c:axId val="344198111"/>
+        <c:scaling>
+          <c:orientation val="minMax"/>
+        </c:scaling>
+        <c:delete val="0"/>
+        <c:axPos val="b"/>
+        <c:numFmt formatCode="General" sourceLinked="1"/>
+        <c:majorTickMark val="none"/>
+        <c:minorTickMark val="none"/>
+        <c:tickLblPos val="nextTo"/>
+        <c:spPr>
+          <a:noFill/>
+          <a:ln w="9525" cap="flat" cmpd="sng" algn="ctr">
+            <a:solidFill>
+              <a:schemeClr val="tx1">
+                <a:lumMod val="15000"/>
+                <a:lumOff val="85000"/>
+              </a:schemeClr>
+            </a:solidFill>
+            <a:round/>
+          </a:ln>
+          <a:effectLst/>
+        </c:spPr>
+        <c:txPr>
+          <a:bodyPr rot="-60000000" spcFirstLastPara="1" vertOverflow="ellipsis" vert="horz" wrap="square" anchor="ctr" anchorCtr="1"/>
+          <a:lstStyle/>
+          <a:p>
+            <a:pPr>
+              <a:defRPr sz="1197" b="0" i="0" u="none" strike="noStrike" kern="1200" baseline="0">
+                <a:solidFill>
+                  <a:schemeClr val="tx1">
+                    <a:lumMod val="65000"/>
+                    <a:lumOff val="35000"/>
+                  </a:schemeClr>
+                </a:solidFill>
+                <a:latin typeface="+mn-lt"/>
+                <a:ea typeface="+mn-ea"/>
+                <a:cs typeface="+mn-cs"/>
+              </a:defRPr>
+            </a:pPr>
+            <a:endParaRPr lang="zh-CN"/>
+          </a:p>
+        </c:txPr>
+        <c:crossAx val="344198591"/>
+        <c:crosses val="autoZero"/>
+        <c:auto val="1"/>
+        <c:lblAlgn val="ctr"/>
+        <c:lblOffset val="100"/>
+        <c:noMultiLvlLbl val="0"/>
+      </c:catAx>
+      <c:valAx>
+        <c:axId val="344198591"/>
+        <c:scaling>
+          <c:orientation val="minMax"/>
+        </c:scaling>
+        <c:delete val="0"/>
+        <c:axPos val="l"/>
+        <c:majorGridlines>
+          <c:spPr>
+            <a:ln w="9525" cap="flat" cmpd="sng" algn="ctr">
+              <a:solidFill>
+                <a:schemeClr val="tx1">
+                  <a:lumMod val="15000"/>
+                  <a:lumOff val="85000"/>
+                </a:schemeClr>
+              </a:solidFill>
+              <a:round/>
+            </a:ln>
+            <a:effectLst/>
+          </c:spPr>
+        </c:majorGridlines>
+        <c:numFmt formatCode="General" sourceLinked="1"/>
+        <c:majorTickMark val="none"/>
+        <c:minorTickMark val="none"/>
+        <c:tickLblPos val="nextTo"/>
+        <c:spPr>
+          <a:noFill/>
+          <a:ln>
+            <a:noFill/>
+          </a:ln>
+          <a:effectLst/>
+        </c:spPr>
+        <c:txPr>
+          <a:bodyPr rot="-60000000" spcFirstLastPara="1" vertOverflow="ellipsis" vert="horz" wrap="square" anchor="ctr" anchorCtr="1"/>
+          <a:lstStyle/>
+          <a:p>
+            <a:pPr>
+              <a:defRPr sz="1197" b="0" i="0" u="none" strike="noStrike" kern="1200" baseline="0">
+                <a:solidFill>
+                  <a:schemeClr val="tx1">
+                    <a:lumMod val="65000"/>
+                    <a:lumOff val="35000"/>
+                  </a:schemeClr>
+                </a:solidFill>
+                <a:latin typeface="+mn-lt"/>
+                <a:ea typeface="+mn-ea"/>
+                <a:cs typeface="+mn-cs"/>
+              </a:defRPr>
+            </a:pPr>
+            <a:endParaRPr lang="zh-CN"/>
+          </a:p>
+        </c:txPr>
+        <c:crossAx val="344198111"/>
+        <c:crosses val="autoZero"/>
+        <c:crossBetween val="between"/>
+      </c:valAx>
+      <c:spPr>
+        <a:noFill/>
+        <a:ln>
+          <a:noFill/>
+        </a:ln>
+        <a:effectLst/>
+      </c:spPr>
+    </c:plotArea>
+    <c:legend>
+      <c:legendPos val="b"/>
+      <c:overlay val="0"/>
+      <c:spPr>
+        <a:noFill/>
+        <a:ln>
+          <a:noFill/>
+        </a:ln>
+        <a:effectLst/>
+      </c:spPr>
+      <c:txPr>
+        <a:bodyPr rot="0" spcFirstLastPara="1" vertOverflow="ellipsis" vert="horz" wrap="square" anchor="ctr" anchorCtr="1"/>
+        <a:lstStyle/>
+        <a:p>
+          <a:pPr>
+            <a:defRPr sz="1197" b="0" i="0" u="none" strike="noStrike" kern="1200" baseline="0">
+              <a:solidFill>
+                <a:schemeClr val="tx1">
+                  <a:lumMod val="65000"/>
+                  <a:lumOff val="35000"/>
+                </a:schemeClr>
+              </a:solidFill>
+              <a:latin typeface="+mn-lt"/>
+              <a:ea typeface="+mn-ea"/>
+              <a:cs typeface="+mn-cs"/>
+            </a:defRPr>
+          </a:pPr>
+          <a:endParaRPr lang="zh-CN"/>
+        </a:p>
+      </c:txPr>
+    </c:legend>
+    <c:plotVisOnly val="1"/>
+    <c:dispBlanksAs val="gap"/>
+    <c:extLst>
+      <c:ext xmlns:c16r3="http://schemas.microsoft.com/office/drawing/2017/03/chart" uri="{56B9EC1D-385E-4148-901F-78D8002777C0}">
+        <c16r3:dataDisplayOptions16>
+          <c16r3:dispNaAsBlank val="1"/>
+        </c16r3:dataDisplayOptions16>
+      </c:ext>
+    </c:extLst>
+    <c:showDLblsOverMax val="0"/>
+  </c:chart>
+  <c:spPr>
+    <a:noFill/>
+    <a:ln>
+      <a:noFill/>
+    </a:ln>
+    <a:effectLst/>
+  </c:spPr>
+  <c:txPr>
+    <a:bodyPr/>
+    <a:lstStyle/>
+    <a:p>
+      <a:pPr>
+        <a:defRPr/>
+      </a:pPr>
+      <a:endParaRPr lang="zh-CN"/>
+    </a:p>
+  </c:txPr>
+  <c:externalData r:id="rId3">
+    <c:autoUpdate val="0"/>
+  </c:externalData>
+</c:chartSpace>
+</file>
+
+<file path=ppt/charts/chart5.xml><?xml version="1.0" encoding="utf-8"?>
+<c:chartSpace xmlns:c="http://schemas.openxmlformats.org/drawingml/2006/chart" xmlns:a="http://schemas.openxmlformats.org/drawingml/2006/main" xmlns:r="http://schemas.openxmlformats.org/officeDocument/2006/relationships" xmlns:c16r2="http://schemas.microsoft.com/office/drawing/2015/06/chart">
+  <c:date1904 val="0"/>
+  <c:lang val="zh-CN"/>
+  <c:roundedCorners val="0"/>
+  <mc:AlternateContent xmlns:mc="http://schemas.openxmlformats.org/markup-compatibility/2006">
+    <mc:Choice xmlns:c14="http://schemas.microsoft.com/office/drawing/2007/8/2/chart" Requires="c14">
+      <c14:style val="102"/>
+    </mc:Choice>
+    <mc:Fallback>
+      <c:style val="2"/>
+    </mc:Fallback>
+  </mc:AlternateContent>
+  <c:chart>
+    <c:autoTitleDeleted val="0"/>
+    <c:plotArea>
+      <c:layout/>
+      <c:pieChart>
+        <c:varyColors val="1"/>
+        <c:ser>
+          <c:idx val="0"/>
+          <c:order val="0"/>
+          <c:tx>
+            <c:strRef>
+              <c:f>Sheet1!$B$1</c:f>
+              <c:strCache>
+                <c:ptCount val="1"/>
+                <c:pt idx="0">
+                  <c:v>销售额</c:v>
+                </c:pt>
+              </c:strCache>
+            </c:strRef>
+          </c:tx>
+          <c:dPt>
+            <c:idx val="0"/>
+            <c:bubble3D val="0"/>
+            <c:spPr>
+              <a:solidFill>
+                <a:schemeClr val="accent1"/>
+              </a:solidFill>
+              <a:ln w="19050">
+                <a:solidFill>
+                  <a:schemeClr val="lt1"/>
+                </a:solidFill>
+              </a:ln>
+              <a:effectLst/>
+            </c:spPr>
+          </c:dPt>
+          <c:dPt>
+            <c:idx val="1"/>
+            <c:bubble3D val="0"/>
+            <c:spPr>
+              <a:gradFill flip="none" rotWithShape="1">
+                <a:gsLst>
+                  <a:gs pos="0">
+                    <a:srgbClr val="288C3C"/>
+                  </a:gs>
+                  <a:gs pos="100000">
+                    <a:srgbClr val="C8F0C8"/>
+                  </a:gs>
+                </a:gsLst>
+                <a:lin ang="5400000" scaled="1"/>
+                <a:tileRect/>
+              </a:gradFill>
+              <a:ln w="19050">
+                <a:solidFill>
+                  <a:schemeClr val="lt1"/>
+                </a:solidFill>
+              </a:ln>
+              <a:effectLst/>
+            </c:spPr>
+            <c:extLst>
+              <c:ext xmlns:c16="http://schemas.microsoft.com/office/drawing/2014/chart" uri="{C3380CC4-5D6E-409C-BE32-E72D297353CC}">
+                <c16:uniqueId val="{00000001-D615-467B-A807-AB6640391134}"/>
+              </c:ext>
+            </c:extLst>
+          </c:dPt>
+          <c:dPt>
+            <c:idx val="2"/>
+            <c:bubble3D val="0"/>
+            <c:spPr>
+              <a:solidFill>
+                <a:schemeClr val="accent3"/>
+              </a:solidFill>
+              <a:ln w="19050">
+                <a:solidFill>
+                  <a:schemeClr val="lt1"/>
+                </a:solidFill>
+              </a:ln>
+              <a:effectLst/>
+            </c:spPr>
+          </c:dPt>
+          <c:dPt>
+            <c:idx val="3"/>
+            <c:bubble3D val="0"/>
+            <c:spPr>
+              <a:solidFill>
+                <a:schemeClr val="accent4"/>
+              </a:solidFill>
+              <a:ln w="19050">
+                <a:solidFill>
+                  <a:schemeClr val="lt1"/>
+                </a:solidFill>
+              </a:ln>
+              <a:effectLst/>
+            </c:spPr>
+          </c:dPt>
+          <c:cat>
+            <c:strRef>
+              <c:f>Sheet1!$A$2:$A$5</c:f>
+              <c:strCache>
+                <c:ptCount val="4"/>
+                <c:pt idx="0">
+                  <c:v>第一季度</c:v>
+                </c:pt>
+                <c:pt idx="1">
+                  <c:v>第二季度</c:v>
+                </c:pt>
+                <c:pt idx="2">
+                  <c:v>第三季度</c:v>
+                </c:pt>
+                <c:pt idx="3">
+                  <c:v>第四季度</c:v>
+                </c:pt>
+              </c:strCache>
+            </c:strRef>
+          </c:cat>
+          <c:val>
+            <c:numRef>
+              <c:f>Sheet1!$B$2:$B$5</c:f>
+              <c:numCache>
+                <c:formatCode>General</c:formatCode>
+                <c:ptCount val="4"/>
+                <c:pt idx="0">
+                  <c:v>8.1999999999999993</c:v>
+                </c:pt>
+                <c:pt idx="1">
+                  <c:v>3.2</c:v>
+                </c:pt>
+                <c:pt idx="2">
+                  <c:v>1.4</c:v>
+                </c:pt>
+                <c:pt idx="3">
+                  <c:v>1.2</c:v>
+                </c:pt>
+              </c:numCache>
+            </c:numRef>
+          </c:val>
+          <c:extLst>
+            <c:ext xmlns:c16="http://schemas.microsoft.com/office/drawing/2014/chart" uri="{C3380CC4-5D6E-409C-BE32-E72D297353CC}">
+              <c16:uniqueId val="{00000000-D615-467B-A807-AB6640391134}"/>
+            </c:ext>
+          </c:extLst>
+        </c:ser>
+        <c:dLbls>
+          <c:showLegendKey val="0"/>
+          <c:showVal val="0"/>
+          <c:showCatName val="0"/>
+          <c:showSerName val="0"/>
+          <c:showPercent val="0"/>
+          <c:showBubbleSize val="0"/>
+          <c:showLeaderLines val="1"/>
+        </c:dLbls>
+        <c:firstSliceAng val="0"/>
+      </c:pieChart>
+      <c:spPr>
+        <a:noFill/>
         <a:ln>
           <a:noFill/>
         </a:ln>
@@ -1417,6 +2101,86 @@
 </cs:colorStyle>
 </file>
 
+<file path=ppt/charts/colors4.xml><?xml version="1.0" encoding="utf-8"?>
+<cs:colorStyle xmlns:cs="http://schemas.microsoft.com/office/drawing/2012/chartStyle" xmlns:a="http://schemas.openxmlformats.org/drawingml/2006/main" meth="cycle" id="10">
+  <a:schemeClr val="accent1"/>
+  <a:schemeClr val="accent2"/>
+  <a:schemeClr val="accent3"/>
+  <a:schemeClr val="accent4"/>
+  <a:schemeClr val="accent5"/>
+  <a:schemeClr val="accent6"/>
+  <cs:variation/>
+  <cs:variation>
+    <a:lumMod val="60000"/>
+  </cs:variation>
+  <cs:variation>
+    <a:lumMod val="80000"/>
+    <a:lumOff val="20000"/>
+  </cs:variation>
+  <cs:variation>
+    <a:lumMod val="80000"/>
+  </cs:variation>
+  <cs:variation>
+    <a:lumMod val="60000"/>
+    <a:lumOff val="40000"/>
+  </cs:variation>
+  <cs:variation>
+    <a:lumMod val="50000"/>
+  </cs:variation>
+  <cs:variation>
+    <a:lumMod val="70000"/>
+    <a:lumOff val="30000"/>
+  </cs:variation>
+  <cs:variation>
+    <a:lumMod val="70000"/>
+  </cs:variation>
+  <cs:variation>
+    <a:lumMod val="50000"/>
+    <a:lumOff val="50000"/>
+  </cs:variation>
+</cs:colorStyle>
+</file>
+
+<file path=ppt/charts/colors5.xml><?xml version="1.0" encoding="utf-8"?>
+<cs:colorStyle xmlns:cs="http://schemas.microsoft.com/office/drawing/2012/chartStyle" xmlns:a="http://schemas.openxmlformats.org/drawingml/2006/main" meth="cycle" id="10">
+  <a:schemeClr val="accent1"/>
+  <a:schemeClr val="accent2"/>
+  <a:schemeClr val="accent3"/>
+  <a:schemeClr val="accent4"/>
+  <a:schemeClr val="accent5"/>
+  <a:schemeClr val="accent6"/>
+  <cs:variation/>
+  <cs:variation>
+    <a:lumMod val="60000"/>
+  </cs:variation>
+  <cs:variation>
+    <a:lumMod val="80000"/>
+    <a:lumOff val="20000"/>
+  </cs:variation>
+  <cs:variation>
+    <a:lumMod val="80000"/>
+  </cs:variation>
+  <cs:variation>
+    <a:lumMod val="60000"/>
+    <a:lumOff val="40000"/>
+  </cs:variation>
+  <cs:variation>
+    <a:lumMod val="50000"/>
+  </cs:variation>
+  <cs:variation>
+    <a:lumMod val="70000"/>
+    <a:lumOff val="30000"/>
+  </cs:variation>
+  <cs:variation>
+    <a:lumMod val="70000"/>
+  </cs:variation>
+  <cs:variation>
+    <a:lumMod val="50000"/>
+    <a:lumOff val="50000"/>
+  </cs:variation>
+</cs:colorStyle>
+</file>
+
 <file path=ppt/charts/style1.xml><?xml version="1.0" encoding="utf-8"?>
 <cs:chartStyle xmlns:cs="http://schemas.microsoft.com/office/drawing/2012/chartStyle" xmlns:a="http://schemas.openxmlformats.org/drawingml/2006/main" id="201">
   <cs:axisTitle>
@@ -2933,6 +3697,1028 @@
         <a:round/>
       </a:ln>
     </cs:spPr>
+    <cs:defRPr sz="1197" kern="1200"/>
+  </cs:valueAxis>
+  <cs:wall>
+    <cs:lnRef idx="0"/>
+    <cs:fillRef idx="0"/>
+    <cs:effectRef idx="0"/>
+    <cs:fontRef idx="minor">
+      <a:schemeClr val="tx1"/>
+    </cs:fontRef>
+    <cs:spPr>
+      <a:noFill/>
+      <a:ln>
+        <a:noFill/>
+      </a:ln>
+    </cs:spPr>
+  </cs:wall>
+</cs:chartStyle>
+</file>
+
+<file path=ppt/charts/style4.xml><?xml version="1.0" encoding="utf-8"?>
+<cs:chartStyle xmlns:cs="http://schemas.microsoft.com/office/drawing/2012/chartStyle" xmlns:a="http://schemas.openxmlformats.org/drawingml/2006/main" id="201">
+  <cs:axisTitle>
+    <cs:lnRef idx="0"/>
+    <cs:fillRef idx="0"/>
+    <cs:effectRef idx="0"/>
+    <cs:fontRef idx="minor">
+      <a:schemeClr val="tx1">
+        <a:lumMod val="65000"/>
+        <a:lumOff val="35000"/>
+      </a:schemeClr>
+    </cs:fontRef>
+    <cs:defRPr sz="1330" kern="1200"/>
+  </cs:axisTitle>
+  <cs:categoryAxis>
+    <cs:lnRef idx="0"/>
+    <cs:fillRef idx="0"/>
+    <cs:effectRef idx="0"/>
+    <cs:fontRef idx="minor">
+      <a:schemeClr val="tx1">
+        <a:lumMod val="65000"/>
+        <a:lumOff val="35000"/>
+      </a:schemeClr>
+    </cs:fontRef>
+    <cs:spPr>
+      <a:ln w="9525" cap="flat" cmpd="sng" algn="ctr">
+        <a:solidFill>
+          <a:schemeClr val="tx1">
+            <a:lumMod val="15000"/>
+            <a:lumOff val="85000"/>
+          </a:schemeClr>
+        </a:solidFill>
+        <a:round/>
+      </a:ln>
+    </cs:spPr>
+    <cs:defRPr sz="1197" kern="1200"/>
+  </cs:categoryAxis>
+  <cs:chartArea mods="allowNoFillOverride allowNoLineOverride">
+    <cs:lnRef idx="0"/>
+    <cs:fillRef idx="0"/>
+    <cs:effectRef idx="0"/>
+    <cs:fontRef idx="minor">
+      <a:schemeClr val="tx1"/>
+    </cs:fontRef>
+    <cs:spPr>
+      <a:solidFill>
+        <a:schemeClr val="bg1"/>
+      </a:solidFill>
+      <a:ln w="9525" cap="flat" cmpd="sng" algn="ctr">
+        <a:solidFill>
+          <a:schemeClr val="tx1">
+            <a:lumMod val="15000"/>
+            <a:lumOff val="85000"/>
+          </a:schemeClr>
+        </a:solidFill>
+        <a:round/>
+      </a:ln>
+    </cs:spPr>
+    <cs:defRPr sz="1330" kern="1200"/>
+  </cs:chartArea>
+  <cs:dataLabel>
+    <cs:lnRef idx="0"/>
+    <cs:fillRef idx="0"/>
+    <cs:effectRef idx="0"/>
+    <cs:fontRef idx="minor">
+      <a:schemeClr val="tx1">
+        <a:lumMod val="75000"/>
+        <a:lumOff val="25000"/>
+      </a:schemeClr>
+    </cs:fontRef>
+    <cs:defRPr sz="1197" kern="1200"/>
+  </cs:dataLabel>
+  <cs:dataLabelCallout>
+    <cs:lnRef idx="0"/>
+    <cs:fillRef idx="0"/>
+    <cs:effectRef idx="0"/>
+    <cs:fontRef idx="minor">
+      <a:schemeClr val="dk1">
+        <a:lumMod val="65000"/>
+        <a:lumOff val="35000"/>
+      </a:schemeClr>
+    </cs:fontRef>
+    <cs:spPr>
+      <a:solidFill>
+        <a:schemeClr val="lt1"/>
+      </a:solidFill>
+      <a:ln>
+        <a:solidFill>
+          <a:schemeClr val="dk1">
+            <a:lumMod val="25000"/>
+            <a:lumOff val="75000"/>
+          </a:schemeClr>
+        </a:solidFill>
+      </a:ln>
+    </cs:spPr>
+    <cs:defRPr sz="1197" kern="1200"/>
+    <cs:bodyPr rot="0" spcFirstLastPara="1" vertOverflow="clip" horzOverflow="clip" vert="horz" wrap="square" lIns="36576" tIns="18288" rIns="36576" bIns="18288" anchor="ctr" anchorCtr="1">
+      <a:spAutoFit/>
+    </cs:bodyPr>
+  </cs:dataLabelCallout>
+  <cs:dataPoint>
+    <cs:lnRef idx="0"/>
+    <cs:fillRef idx="1">
+      <cs:styleClr val="auto"/>
+    </cs:fillRef>
+    <cs:effectRef idx="0"/>
+    <cs:fontRef idx="minor">
+      <a:schemeClr val="tx1"/>
+    </cs:fontRef>
+  </cs:dataPoint>
+  <cs:dataPoint3D>
+    <cs:lnRef idx="0"/>
+    <cs:fillRef idx="1">
+      <cs:styleClr val="auto"/>
+    </cs:fillRef>
+    <cs:effectRef idx="0"/>
+    <cs:fontRef idx="minor">
+      <a:schemeClr val="tx1"/>
+    </cs:fontRef>
+  </cs:dataPoint3D>
+  <cs:dataPointLine>
+    <cs:lnRef idx="0">
+      <cs:styleClr val="auto"/>
+    </cs:lnRef>
+    <cs:fillRef idx="1"/>
+    <cs:effectRef idx="0"/>
+    <cs:fontRef idx="minor">
+      <a:schemeClr val="tx1"/>
+    </cs:fontRef>
+    <cs:spPr>
+      <a:ln w="28575" cap="rnd">
+        <a:solidFill>
+          <a:schemeClr val="phClr"/>
+        </a:solidFill>
+        <a:round/>
+      </a:ln>
+    </cs:spPr>
+  </cs:dataPointLine>
+  <cs:dataPointMarker>
+    <cs:lnRef idx="0">
+      <cs:styleClr val="auto"/>
+    </cs:lnRef>
+    <cs:fillRef idx="1">
+      <cs:styleClr val="auto"/>
+    </cs:fillRef>
+    <cs:effectRef idx="0"/>
+    <cs:fontRef idx="minor">
+      <a:schemeClr val="tx1"/>
+    </cs:fontRef>
+    <cs:spPr>
+      <a:ln w="9525">
+        <a:solidFill>
+          <a:schemeClr val="phClr"/>
+        </a:solidFill>
+      </a:ln>
+    </cs:spPr>
+  </cs:dataPointMarker>
+  <cs:dataPointMarkerLayout symbol="circle" size="5"/>
+  <cs:dataPointWireframe>
+    <cs:lnRef idx="0">
+      <cs:styleClr val="auto"/>
+    </cs:lnRef>
+    <cs:fillRef idx="1"/>
+    <cs:effectRef idx="0"/>
+    <cs:fontRef idx="minor">
+      <a:schemeClr val="tx1"/>
+    </cs:fontRef>
+    <cs:spPr>
+      <a:ln w="9525" cap="rnd">
+        <a:solidFill>
+          <a:schemeClr val="phClr"/>
+        </a:solidFill>
+        <a:round/>
+      </a:ln>
+    </cs:spPr>
+  </cs:dataPointWireframe>
+  <cs:dataTable>
+    <cs:lnRef idx="0"/>
+    <cs:fillRef idx="0"/>
+    <cs:effectRef idx="0"/>
+    <cs:fontRef idx="minor">
+      <a:schemeClr val="tx1">
+        <a:lumMod val="65000"/>
+        <a:lumOff val="35000"/>
+      </a:schemeClr>
+    </cs:fontRef>
+    <cs:spPr>
+      <a:noFill/>
+      <a:ln w="9525" cap="flat" cmpd="sng" algn="ctr">
+        <a:solidFill>
+          <a:schemeClr val="tx1">
+            <a:lumMod val="15000"/>
+            <a:lumOff val="85000"/>
+          </a:schemeClr>
+        </a:solidFill>
+        <a:round/>
+      </a:ln>
+    </cs:spPr>
+    <cs:defRPr sz="1197" kern="1200"/>
+  </cs:dataTable>
+  <cs:downBar>
+    <cs:lnRef idx="0"/>
+    <cs:fillRef idx="0"/>
+    <cs:effectRef idx="0"/>
+    <cs:fontRef idx="minor">
+      <a:schemeClr val="dk1"/>
+    </cs:fontRef>
+    <cs:spPr>
+      <a:solidFill>
+        <a:schemeClr val="dk1">
+          <a:lumMod val="65000"/>
+          <a:lumOff val="35000"/>
+        </a:schemeClr>
+      </a:solidFill>
+      <a:ln w="9525">
+        <a:solidFill>
+          <a:schemeClr val="tx1">
+            <a:lumMod val="65000"/>
+            <a:lumOff val="35000"/>
+          </a:schemeClr>
+        </a:solidFill>
+      </a:ln>
+    </cs:spPr>
+  </cs:downBar>
+  <cs:dropLine>
+    <cs:lnRef idx="0"/>
+    <cs:fillRef idx="0"/>
+    <cs:effectRef idx="0"/>
+    <cs:fontRef idx="minor">
+      <a:schemeClr val="tx1"/>
+    </cs:fontRef>
+    <cs:spPr>
+      <a:ln w="9525" cap="flat" cmpd="sng" algn="ctr">
+        <a:solidFill>
+          <a:schemeClr val="tx1">
+            <a:lumMod val="35000"/>
+            <a:lumOff val="65000"/>
+          </a:schemeClr>
+        </a:solidFill>
+        <a:round/>
+      </a:ln>
+    </cs:spPr>
+  </cs:dropLine>
+  <cs:errorBar>
+    <cs:lnRef idx="0"/>
+    <cs:fillRef idx="0"/>
+    <cs:effectRef idx="0"/>
+    <cs:fontRef idx="minor">
+      <a:schemeClr val="tx1"/>
+    </cs:fontRef>
+    <cs:spPr>
+      <a:ln w="9525" cap="flat" cmpd="sng" algn="ctr">
+        <a:solidFill>
+          <a:schemeClr val="tx1">
+            <a:lumMod val="65000"/>
+            <a:lumOff val="35000"/>
+          </a:schemeClr>
+        </a:solidFill>
+        <a:round/>
+      </a:ln>
+    </cs:spPr>
+  </cs:errorBar>
+  <cs:floor>
+    <cs:lnRef idx="0"/>
+    <cs:fillRef idx="0"/>
+    <cs:effectRef idx="0"/>
+    <cs:fontRef idx="minor">
+      <a:schemeClr val="tx1"/>
+    </cs:fontRef>
+    <cs:spPr>
+      <a:noFill/>
+      <a:ln>
+        <a:noFill/>
+      </a:ln>
+    </cs:spPr>
+  </cs:floor>
+  <cs:gridlineMajor>
+    <cs:lnRef idx="0"/>
+    <cs:fillRef idx="0"/>
+    <cs:effectRef idx="0"/>
+    <cs:fontRef idx="minor">
+      <a:schemeClr val="tx1"/>
+    </cs:fontRef>
+    <cs:spPr>
+      <a:ln w="9525" cap="flat" cmpd="sng" algn="ctr">
+        <a:solidFill>
+          <a:schemeClr val="tx1">
+            <a:lumMod val="15000"/>
+            <a:lumOff val="85000"/>
+          </a:schemeClr>
+        </a:solidFill>
+        <a:round/>
+      </a:ln>
+    </cs:spPr>
+  </cs:gridlineMajor>
+  <cs:gridlineMinor>
+    <cs:lnRef idx="0"/>
+    <cs:fillRef idx="0"/>
+    <cs:effectRef idx="0"/>
+    <cs:fontRef idx="minor">
+      <a:schemeClr val="tx1"/>
+    </cs:fontRef>
+    <cs:spPr>
+      <a:ln w="9525" cap="flat" cmpd="sng" algn="ctr">
+        <a:solidFill>
+          <a:schemeClr val="tx1">
+            <a:lumMod val="5000"/>
+            <a:lumOff val="95000"/>
+          </a:schemeClr>
+        </a:solidFill>
+        <a:round/>
+      </a:ln>
+    </cs:spPr>
+  </cs:gridlineMinor>
+  <cs:hiLoLine>
+    <cs:lnRef idx="0"/>
+    <cs:fillRef idx="0"/>
+    <cs:effectRef idx="0"/>
+    <cs:fontRef idx="minor">
+      <a:schemeClr val="tx1"/>
+    </cs:fontRef>
+    <cs:spPr>
+      <a:ln w="9525" cap="flat" cmpd="sng" algn="ctr">
+        <a:solidFill>
+          <a:schemeClr val="tx1">
+            <a:lumMod val="75000"/>
+            <a:lumOff val="25000"/>
+          </a:schemeClr>
+        </a:solidFill>
+        <a:round/>
+      </a:ln>
+    </cs:spPr>
+  </cs:hiLoLine>
+  <cs:leaderLine>
+    <cs:lnRef idx="0"/>
+    <cs:fillRef idx="0"/>
+    <cs:effectRef idx="0"/>
+    <cs:fontRef idx="minor">
+      <a:schemeClr val="tx1"/>
+    </cs:fontRef>
+    <cs:spPr>
+      <a:ln w="9525" cap="flat" cmpd="sng" algn="ctr">
+        <a:solidFill>
+          <a:schemeClr val="tx1">
+            <a:lumMod val="35000"/>
+            <a:lumOff val="65000"/>
+          </a:schemeClr>
+        </a:solidFill>
+        <a:round/>
+      </a:ln>
+    </cs:spPr>
+  </cs:leaderLine>
+  <cs:legend>
+    <cs:lnRef idx="0"/>
+    <cs:fillRef idx="0"/>
+    <cs:effectRef idx="0"/>
+    <cs:fontRef idx="minor">
+      <a:schemeClr val="tx1">
+        <a:lumMod val="65000"/>
+        <a:lumOff val="35000"/>
+      </a:schemeClr>
+    </cs:fontRef>
+    <cs:defRPr sz="1197" kern="1200"/>
+  </cs:legend>
+  <cs:plotArea mods="allowNoFillOverride allowNoLineOverride">
+    <cs:lnRef idx="0"/>
+    <cs:fillRef idx="0"/>
+    <cs:effectRef idx="0"/>
+    <cs:fontRef idx="minor">
+      <a:schemeClr val="tx1"/>
+    </cs:fontRef>
+  </cs:plotArea>
+  <cs:plotArea3D mods="allowNoFillOverride allowNoLineOverride">
+    <cs:lnRef idx="0"/>
+    <cs:fillRef idx="0"/>
+    <cs:effectRef idx="0"/>
+    <cs:fontRef idx="minor">
+      <a:schemeClr val="tx1"/>
+    </cs:fontRef>
+  </cs:plotArea3D>
+  <cs:seriesAxis>
+    <cs:lnRef idx="0"/>
+    <cs:fillRef idx="0"/>
+    <cs:effectRef idx="0"/>
+    <cs:fontRef idx="minor">
+      <a:schemeClr val="tx1">
+        <a:lumMod val="65000"/>
+        <a:lumOff val="35000"/>
+      </a:schemeClr>
+    </cs:fontRef>
+    <cs:defRPr sz="1197" kern="1200"/>
+  </cs:seriesAxis>
+  <cs:seriesLine>
+    <cs:lnRef idx="0"/>
+    <cs:fillRef idx="0"/>
+    <cs:effectRef idx="0"/>
+    <cs:fontRef idx="minor">
+      <a:schemeClr val="tx1"/>
+    </cs:fontRef>
+    <cs:spPr>
+      <a:ln w="9525" cap="flat" cmpd="sng" algn="ctr">
+        <a:solidFill>
+          <a:schemeClr val="tx1">
+            <a:lumMod val="35000"/>
+            <a:lumOff val="65000"/>
+          </a:schemeClr>
+        </a:solidFill>
+        <a:round/>
+      </a:ln>
+    </cs:spPr>
+  </cs:seriesLine>
+  <cs:title>
+    <cs:lnRef idx="0"/>
+    <cs:fillRef idx="0"/>
+    <cs:effectRef idx="0"/>
+    <cs:fontRef idx="minor">
+      <a:schemeClr val="tx1">
+        <a:lumMod val="65000"/>
+        <a:lumOff val="35000"/>
+      </a:schemeClr>
+    </cs:fontRef>
+    <cs:defRPr sz="1862" b="0" kern="1200" spc="0" baseline="0"/>
+  </cs:title>
+  <cs:trendline>
+    <cs:lnRef idx="0">
+      <cs:styleClr val="auto"/>
+    </cs:lnRef>
+    <cs:fillRef idx="0"/>
+    <cs:effectRef idx="0"/>
+    <cs:fontRef idx="minor">
+      <a:schemeClr val="tx1"/>
+    </cs:fontRef>
+    <cs:spPr>
+      <a:ln w="19050" cap="rnd">
+        <a:solidFill>
+          <a:schemeClr val="phClr"/>
+        </a:solidFill>
+        <a:prstDash val="sysDot"/>
+      </a:ln>
+    </cs:spPr>
+  </cs:trendline>
+  <cs:trendlineLabel>
+    <cs:lnRef idx="0"/>
+    <cs:fillRef idx="0"/>
+    <cs:effectRef idx="0"/>
+    <cs:fontRef idx="minor">
+      <a:schemeClr val="tx1">
+        <a:lumMod val="65000"/>
+        <a:lumOff val="35000"/>
+      </a:schemeClr>
+    </cs:fontRef>
+    <cs:defRPr sz="1197" kern="1200"/>
+  </cs:trendlineLabel>
+  <cs:upBar>
+    <cs:lnRef idx="0"/>
+    <cs:fillRef idx="0"/>
+    <cs:effectRef idx="0"/>
+    <cs:fontRef idx="minor">
+      <a:schemeClr val="dk1"/>
+    </cs:fontRef>
+    <cs:spPr>
+      <a:solidFill>
+        <a:schemeClr val="lt1"/>
+      </a:solidFill>
+      <a:ln w="9525">
+        <a:solidFill>
+          <a:schemeClr val="tx1">
+            <a:lumMod val="15000"/>
+            <a:lumOff val="85000"/>
+          </a:schemeClr>
+        </a:solidFill>
+      </a:ln>
+    </cs:spPr>
+  </cs:upBar>
+  <cs:valueAxis>
+    <cs:lnRef idx="0"/>
+    <cs:fillRef idx="0"/>
+    <cs:effectRef idx="0"/>
+    <cs:fontRef idx="minor">
+      <a:schemeClr val="tx1">
+        <a:lumMod val="65000"/>
+        <a:lumOff val="35000"/>
+      </a:schemeClr>
+    </cs:fontRef>
+    <cs:defRPr sz="1197" kern="1200"/>
+  </cs:valueAxis>
+  <cs:wall>
+    <cs:lnRef idx="0"/>
+    <cs:fillRef idx="0"/>
+    <cs:effectRef idx="0"/>
+    <cs:fontRef idx="minor">
+      <a:schemeClr val="tx1"/>
+    </cs:fontRef>
+    <cs:spPr>
+      <a:noFill/>
+      <a:ln>
+        <a:noFill/>
+      </a:ln>
+    </cs:spPr>
+  </cs:wall>
+</cs:chartStyle>
+</file>
+
+<file path=ppt/charts/style5.xml><?xml version="1.0" encoding="utf-8"?>
+<cs:chartStyle xmlns:cs="http://schemas.microsoft.com/office/drawing/2012/chartStyle" xmlns:a="http://schemas.openxmlformats.org/drawingml/2006/main" id="251">
+  <cs:axisTitle>
+    <cs:lnRef idx="0"/>
+    <cs:fillRef idx="0"/>
+    <cs:effectRef idx="0"/>
+    <cs:fontRef idx="minor">
+      <a:schemeClr val="tx1">
+        <a:lumMod val="65000"/>
+        <a:lumOff val="35000"/>
+      </a:schemeClr>
+    </cs:fontRef>
+    <cs:defRPr sz="1330" kern="1200"/>
+  </cs:axisTitle>
+  <cs:categoryAxis>
+    <cs:lnRef idx="0"/>
+    <cs:fillRef idx="0"/>
+    <cs:effectRef idx="0"/>
+    <cs:fontRef idx="minor">
+      <a:schemeClr val="tx1">
+        <a:lumMod val="65000"/>
+        <a:lumOff val="35000"/>
+      </a:schemeClr>
+    </cs:fontRef>
+    <cs:spPr>
+      <a:ln w="9525" cap="flat" cmpd="sng" algn="ctr">
+        <a:solidFill>
+          <a:schemeClr val="tx1">
+            <a:lumMod val="15000"/>
+            <a:lumOff val="85000"/>
+          </a:schemeClr>
+        </a:solidFill>
+        <a:round/>
+      </a:ln>
+    </cs:spPr>
+    <cs:defRPr sz="1197" kern="1200"/>
+  </cs:categoryAxis>
+  <cs:chartArea mods="allowNoFillOverride allowNoLineOverride">
+    <cs:lnRef idx="0"/>
+    <cs:fillRef idx="0"/>
+    <cs:effectRef idx="0"/>
+    <cs:fontRef idx="minor">
+      <a:schemeClr val="tx1"/>
+    </cs:fontRef>
+    <cs:spPr>
+      <a:solidFill>
+        <a:schemeClr val="bg1"/>
+      </a:solidFill>
+      <a:ln w="9525" cap="flat" cmpd="sng" algn="ctr">
+        <a:solidFill>
+          <a:schemeClr val="tx1">
+            <a:lumMod val="15000"/>
+            <a:lumOff val="85000"/>
+          </a:schemeClr>
+        </a:solidFill>
+        <a:round/>
+      </a:ln>
+    </cs:spPr>
+    <cs:defRPr sz="1197" kern="1200"/>
+  </cs:chartArea>
+  <cs:dataLabel>
+    <cs:lnRef idx="0"/>
+    <cs:fillRef idx="0"/>
+    <cs:effectRef idx="0"/>
+    <cs:fontRef idx="minor">
+      <a:schemeClr val="tx1">
+        <a:lumMod val="75000"/>
+        <a:lumOff val="25000"/>
+      </a:schemeClr>
+    </cs:fontRef>
+    <cs:defRPr sz="1197" kern="1200"/>
+  </cs:dataLabel>
+  <cs:dataLabelCallout>
+    <cs:lnRef idx="0"/>
+    <cs:fillRef idx="0"/>
+    <cs:effectRef idx="0"/>
+    <cs:fontRef idx="minor">
+      <a:schemeClr val="dk1">
+        <a:lumMod val="65000"/>
+        <a:lumOff val="35000"/>
+      </a:schemeClr>
+    </cs:fontRef>
+    <cs:spPr>
+      <a:solidFill>
+        <a:schemeClr val="lt1"/>
+      </a:solidFill>
+      <a:ln>
+        <a:solidFill>
+          <a:schemeClr val="dk1">
+            <a:lumMod val="25000"/>
+            <a:lumOff val="75000"/>
+          </a:schemeClr>
+        </a:solidFill>
+      </a:ln>
+    </cs:spPr>
+    <cs:defRPr sz="1197" kern="1200"/>
+    <cs:bodyPr rot="0" spcFirstLastPara="1" vertOverflow="clip" horzOverflow="clip" vert="horz" wrap="square" lIns="36576" tIns="18288" rIns="36576" bIns="18288" anchor="ctr" anchorCtr="1">
+      <a:spAutoFit/>
+    </cs:bodyPr>
+  </cs:dataLabelCallout>
+  <cs:dataPoint>
+    <cs:lnRef idx="0"/>
+    <cs:fillRef idx="1">
+      <cs:styleClr val="auto"/>
+    </cs:fillRef>
+    <cs:effectRef idx="0"/>
+    <cs:fontRef idx="minor">
+      <a:schemeClr val="tx1"/>
+    </cs:fontRef>
+    <cs:spPr>
+      <a:ln w="19050">
+        <a:solidFill>
+          <a:schemeClr val="lt1"/>
+        </a:solidFill>
+      </a:ln>
+    </cs:spPr>
+  </cs:dataPoint>
+  <cs:dataPoint3D>
+    <cs:lnRef idx="0"/>
+    <cs:fillRef idx="1">
+      <cs:styleClr val="auto"/>
+    </cs:fillRef>
+    <cs:effectRef idx="0"/>
+    <cs:fontRef idx="minor">
+      <a:schemeClr val="tx1"/>
+    </cs:fontRef>
+    <cs:spPr>
+      <a:ln w="25400">
+        <a:solidFill>
+          <a:schemeClr val="lt1"/>
+        </a:solidFill>
+      </a:ln>
+    </cs:spPr>
+  </cs:dataPoint3D>
+  <cs:dataPointLine>
+    <cs:lnRef idx="0">
+      <cs:styleClr val="auto"/>
+    </cs:lnRef>
+    <cs:fillRef idx="0"/>
+    <cs:effectRef idx="0"/>
+    <cs:fontRef idx="minor">
+      <a:schemeClr val="tx1"/>
+    </cs:fontRef>
+    <cs:spPr>
+      <a:ln w="28575" cap="rnd">
+        <a:solidFill>
+          <a:schemeClr val="phClr"/>
+        </a:solidFill>
+        <a:round/>
+      </a:ln>
+    </cs:spPr>
+  </cs:dataPointLine>
+  <cs:dataPointMarker>
+    <cs:lnRef idx="0">
+      <cs:styleClr val="auto"/>
+    </cs:lnRef>
+    <cs:fillRef idx="1">
+      <cs:styleClr val="auto"/>
+    </cs:fillRef>
+    <cs:effectRef idx="0"/>
+    <cs:fontRef idx="minor">
+      <a:schemeClr val="tx1"/>
+    </cs:fontRef>
+    <cs:spPr>
+      <a:ln w="9525">
+        <a:solidFill>
+          <a:schemeClr val="phClr"/>
+        </a:solidFill>
+      </a:ln>
+    </cs:spPr>
+  </cs:dataPointMarker>
+  <cs:dataPointMarkerLayout symbol="circle" size="5"/>
+  <cs:dataPointWireframe>
+    <cs:lnRef idx="0">
+      <cs:styleClr val="auto"/>
+    </cs:lnRef>
+    <cs:fillRef idx="0"/>
+    <cs:effectRef idx="0"/>
+    <cs:fontRef idx="minor">
+      <a:schemeClr val="tx1"/>
+    </cs:fontRef>
+    <cs:spPr>
+      <a:ln w="9525" cap="rnd">
+        <a:solidFill>
+          <a:schemeClr val="phClr"/>
+        </a:solidFill>
+        <a:round/>
+      </a:ln>
+    </cs:spPr>
+  </cs:dataPointWireframe>
+  <cs:dataTable>
+    <cs:lnRef idx="0"/>
+    <cs:fillRef idx="0"/>
+    <cs:effectRef idx="0"/>
+    <cs:fontRef idx="minor">
+      <a:schemeClr val="tx1">
+        <a:lumMod val="65000"/>
+        <a:lumOff val="35000"/>
+      </a:schemeClr>
+    </cs:fontRef>
+    <cs:spPr>
+      <a:noFill/>
+      <a:ln w="9525" cap="flat" cmpd="sng" algn="ctr">
+        <a:solidFill>
+          <a:schemeClr val="tx1">
+            <a:lumMod val="15000"/>
+            <a:lumOff val="85000"/>
+          </a:schemeClr>
+        </a:solidFill>
+        <a:round/>
+      </a:ln>
+    </cs:spPr>
+    <cs:defRPr sz="1197" kern="1200"/>
+  </cs:dataTable>
+  <cs:downBar>
+    <cs:lnRef idx="0"/>
+    <cs:fillRef idx="0"/>
+    <cs:effectRef idx="0"/>
+    <cs:fontRef idx="minor">
+      <a:schemeClr val="tx1"/>
+    </cs:fontRef>
+    <cs:spPr>
+      <a:solidFill>
+        <a:schemeClr val="dk1">
+          <a:lumMod val="75000"/>
+          <a:lumOff val="25000"/>
+        </a:schemeClr>
+      </a:solidFill>
+      <a:ln w="9525" cap="flat" cmpd="sng" algn="ctr">
+        <a:solidFill>
+          <a:schemeClr val="tx1">
+            <a:lumMod val="65000"/>
+            <a:lumOff val="35000"/>
+          </a:schemeClr>
+        </a:solidFill>
+        <a:round/>
+      </a:ln>
+    </cs:spPr>
+  </cs:downBar>
+  <cs:dropLine>
+    <cs:lnRef idx="0"/>
+    <cs:fillRef idx="0"/>
+    <cs:effectRef idx="0"/>
+    <cs:fontRef idx="minor">
+      <a:schemeClr val="tx1"/>
+    </cs:fontRef>
+    <cs:spPr>
+      <a:ln w="9525" cap="flat" cmpd="sng" algn="ctr">
+        <a:solidFill>
+          <a:schemeClr val="tx1">
+            <a:lumMod val="35000"/>
+            <a:lumOff val="65000"/>
+          </a:schemeClr>
+        </a:solidFill>
+        <a:round/>
+      </a:ln>
+    </cs:spPr>
+  </cs:dropLine>
+  <cs:errorBar>
+    <cs:lnRef idx="0"/>
+    <cs:fillRef idx="0"/>
+    <cs:effectRef idx="0"/>
+    <cs:fontRef idx="minor">
+      <a:schemeClr val="tx1"/>
+    </cs:fontRef>
+    <cs:spPr>
+      <a:ln w="9525" cap="flat" cmpd="sng" algn="ctr">
+        <a:solidFill>
+          <a:schemeClr val="tx1">
+            <a:lumMod val="65000"/>
+            <a:lumOff val="35000"/>
+          </a:schemeClr>
+        </a:solidFill>
+        <a:round/>
+      </a:ln>
+    </cs:spPr>
+  </cs:errorBar>
+  <cs:floor>
+    <cs:lnRef idx="0"/>
+    <cs:fillRef idx="0"/>
+    <cs:effectRef idx="0"/>
+    <cs:fontRef idx="minor">
+      <a:schemeClr val="tx1"/>
+    </cs:fontRef>
+    <cs:spPr>
+      <a:noFill/>
+      <a:ln>
+        <a:noFill/>
+      </a:ln>
+    </cs:spPr>
+  </cs:floor>
+  <cs:gridlineMajor>
+    <cs:lnRef idx="0"/>
+    <cs:fillRef idx="0"/>
+    <cs:effectRef idx="0"/>
+    <cs:fontRef idx="minor">
+      <a:schemeClr val="tx1"/>
+    </cs:fontRef>
+    <cs:spPr>
+      <a:ln w="9525" cap="flat" cmpd="sng" algn="ctr">
+        <a:solidFill>
+          <a:schemeClr val="tx1">
+            <a:lumMod val="15000"/>
+            <a:lumOff val="85000"/>
+          </a:schemeClr>
+        </a:solidFill>
+        <a:round/>
+      </a:ln>
+    </cs:spPr>
+  </cs:gridlineMajor>
+  <cs:gridlineMinor>
+    <cs:lnRef idx="0"/>
+    <cs:fillRef idx="0"/>
+    <cs:effectRef idx="0"/>
+    <cs:fontRef idx="minor">
+      <a:schemeClr val="tx1"/>
+    </cs:fontRef>
+    <cs:spPr>
+      <a:ln w="9525" cap="flat" cmpd="sng" algn="ctr">
+        <a:solidFill>
+          <a:schemeClr val="tx1">
+            <a:lumMod val="5000"/>
+            <a:lumOff val="95000"/>
+          </a:schemeClr>
+        </a:solidFill>
+        <a:round/>
+      </a:ln>
+    </cs:spPr>
+  </cs:gridlineMinor>
+  <cs:hiLoLine>
+    <cs:lnRef idx="0"/>
+    <cs:fillRef idx="0"/>
+    <cs:effectRef idx="0"/>
+    <cs:fontRef idx="minor">
+      <a:schemeClr val="tx1"/>
+    </cs:fontRef>
+    <cs:spPr>
+      <a:ln w="9525" cap="flat" cmpd="sng" algn="ctr">
+        <a:solidFill>
+          <a:schemeClr val="tx1">
+            <a:lumMod val="50000"/>
+            <a:lumOff val="50000"/>
+          </a:schemeClr>
+        </a:solidFill>
+        <a:round/>
+      </a:ln>
+    </cs:spPr>
+  </cs:hiLoLine>
+  <cs:leaderLine>
+    <cs:lnRef idx="0"/>
+    <cs:fillRef idx="0"/>
+    <cs:effectRef idx="0"/>
+    <cs:fontRef idx="minor">
+      <a:schemeClr val="tx1"/>
+    </cs:fontRef>
+    <cs:spPr>
+      <a:ln w="9525" cap="flat" cmpd="sng" algn="ctr">
+        <a:solidFill>
+          <a:schemeClr val="tx1">
+            <a:lumMod val="35000"/>
+            <a:lumOff val="65000"/>
+          </a:schemeClr>
+        </a:solidFill>
+        <a:round/>
+      </a:ln>
+    </cs:spPr>
+  </cs:leaderLine>
+  <cs:legend>
+    <cs:lnRef idx="0"/>
+    <cs:fillRef idx="0"/>
+    <cs:effectRef idx="0"/>
+    <cs:fontRef idx="minor">
+      <a:schemeClr val="tx1">
+        <a:lumMod val="65000"/>
+        <a:lumOff val="35000"/>
+      </a:schemeClr>
+    </cs:fontRef>
+    <cs:defRPr sz="1197" kern="1200"/>
+  </cs:legend>
+  <cs:plotArea mods="allowNoFillOverride allowNoLineOverride">
+    <cs:lnRef idx="0"/>
+    <cs:fillRef idx="0"/>
+    <cs:effectRef idx="0"/>
+    <cs:fontRef idx="minor">
+      <a:schemeClr val="tx1"/>
+    </cs:fontRef>
+  </cs:plotArea>
+  <cs:plotArea3D mods="allowNoFillOverride allowNoLineOverride">
+    <cs:lnRef idx="0"/>
+    <cs:fillRef idx="0"/>
+    <cs:effectRef idx="0"/>
+    <cs:fontRef idx="minor">
+      <a:schemeClr val="tx1"/>
+    </cs:fontRef>
+  </cs:plotArea3D>
+  <cs:seriesAxis>
+    <cs:lnRef idx="0"/>
+    <cs:fillRef idx="0"/>
+    <cs:effectRef idx="0"/>
+    <cs:fontRef idx="minor">
+      <a:schemeClr val="tx1">
+        <a:lumMod val="65000"/>
+        <a:lumOff val="35000"/>
+      </a:schemeClr>
+    </cs:fontRef>
+    <cs:defRPr sz="1197" kern="1200"/>
+  </cs:seriesAxis>
+  <cs:seriesLine>
+    <cs:lnRef idx="0"/>
+    <cs:fillRef idx="0"/>
+    <cs:effectRef idx="0"/>
+    <cs:fontRef idx="minor">
+      <a:schemeClr val="tx1"/>
+    </cs:fontRef>
+    <cs:spPr>
+      <a:ln w="9525" cap="flat" cmpd="sng" algn="ctr">
+        <a:solidFill>
+          <a:schemeClr val="tx1">
+            <a:lumMod val="35000"/>
+            <a:lumOff val="65000"/>
+          </a:schemeClr>
+        </a:solidFill>
+        <a:round/>
+      </a:ln>
+    </cs:spPr>
+  </cs:seriesLine>
+  <cs:title>
+    <cs:lnRef idx="0"/>
+    <cs:fillRef idx="0"/>
+    <cs:effectRef idx="0"/>
+    <cs:fontRef idx="minor">
+      <a:schemeClr val="tx1">
+        <a:lumMod val="65000"/>
+        <a:lumOff val="35000"/>
+      </a:schemeClr>
+    </cs:fontRef>
+    <cs:defRPr sz="1862" b="0" kern="1200" spc="0" baseline="0"/>
+  </cs:title>
+  <cs:trendline>
+    <cs:lnRef idx="0">
+      <cs:styleClr val="auto"/>
+    </cs:lnRef>
+    <cs:fillRef idx="0"/>
+    <cs:effectRef idx="0"/>
+    <cs:fontRef idx="minor">
+      <a:schemeClr val="tx1"/>
+    </cs:fontRef>
+    <cs:spPr>
+      <a:ln w="19050" cap="rnd">
+        <a:solidFill>
+          <a:schemeClr val="phClr"/>
+        </a:solidFill>
+        <a:prstDash val="sysDot"/>
+      </a:ln>
+    </cs:spPr>
+  </cs:trendline>
+  <cs:trendlineLabel>
+    <cs:lnRef idx="0"/>
+    <cs:fillRef idx="0"/>
+    <cs:effectRef idx="0"/>
+    <cs:fontRef idx="minor">
+      <a:schemeClr val="tx1">
+        <a:lumMod val="65000"/>
+        <a:lumOff val="35000"/>
+      </a:schemeClr>
+    </cs:fontRef>
+    <cs:defRPr sz="1197" kern="1200"/>
+  </cs:trendlineLabel>
+  <cs:upBar>
+    <cs:lnRef idx="0"/>
+    <cs:fillRef idx="0"/>
+    <cs:effectRef idx="0"/>
+    <cs:fontRef idx="minor">
+      <a:schemeClr val="tx1"/>
+    </cs:fontRef>
+    <cs:spPr>
+      <a:solidFill>
+        <a:schemeClr val="lt1"/>
+      </a:solidFill>
+      <a:ln w="9525" cap="flat" cmpd="sng" algn="ctr">
+        <a:solidFill>
+          <a:schemeClr val="tx1">
+            <a:lumMod val="65000"/>
+            <a:lumOff val="35000"/>
+          </a:schemeClr>
+        </a:solidFill>
+        <a:round/>
+      </a:ln>
+    </cs:spPr>
+  </cs:upBar>
+  <cs:valueAxis>
+    <cs:lnRef idx="0"/>
+    <cs:fillRef idx="0"/>
+    <cs:effectRef idx="0"/>
+    <cs:fontRef idx="minor">
+      <a:schemeClr val="tx1">
+        <a:lumMod val="65000"/>
+        <a:lumOff val="35000"/>
+      </a:schemeClr>
+    </cs:fontRef>
     <cs:defRPr sz="1197" kern="1200"/>
   </cs:valueAxis>
   <cs:wall>
@@ -2974,7 +4760,7 @@
           <p:cNvPr id="2" name="标题 1">
             <a:extLst>
               <a:ext uri="{FF2B5EF4-FFF2-40B4-BE49-F238E27FC236}">
-                <a16:creationId xmlns:a16="http://schemas.microsoft.com/office/drawing/2014/main" id="{0C0E3905-99EF-F370-F94C-EB4818725DFD}"/>
+                <a16:creationId xmlns:a16="http://schemas.microsoft.com/office/drawing/2014/main" id="{F5E79CA1-82FB-9F10-ED38-C16A604FC9BD}"/>
               </a:ext>
             </a:extLst>
           </p:cNvPr>
@@ -3011,7 +4797,7 @@
           <p:cNvPr id="3" name="副标题 2">
             <a:extLst>
               <a:ext uri="{FF2B5EF4-FFF2-40B4-BE49-F238E27FC236}">
-                <a16:creationId xmlns:a16="http://schemas.microsoft.com/office/drawing/2014/main" id="{E38C1CC1-44CE-88D9-8B4F-1E2911AA7AE8}"/>
+                <a16:creationId xmlns:a16="http://schemas.microsoft.com/office/drawing/2014/main" id="{50F48A44-55A5-E91B-045A-105D668793E4}"/>
               </a:ext>
             </a:extLst>
           </p:cNvPr>
@@ -3081,7 +4867,7 @@
           <p:cNvPr id="4" name="日期占位符 3">
             <a:extLst>
               <a:ext uri="{FF2B5EF4-FFF2-40B4-BE49-F238E27FC236}">
-                <a16:creationId xmlns:a16="http://schemas.microsoft.com/office/drawing/2014/main" id="{05A37726-3270-7F52-F281-B9F0FA5B9DDB}"/>
+                <a16:creationId xmlns:a16="http://schemas.microsoft.com/office/drawing/2014/main" id="{BC56AD05-AD41-C1CD-E115-4AE8844708A8}"/>
               </a:ext>
             </a:extLst>
           </p:cNvPr>
@@ -3097,7 +4883,7 @@
           <a:bodyPr/>
           <a:lstStyle/>
           <a:p>
-            <a:fld id="{14A68783-71C6-44C0-96E1-E0D80588316A}" type="datetimeFigureOut">
+            <a:fld id="{8FDC24A8-F9FD-4E6D-9262-B054C6511475}" type="datetimeFigureOut">
               <a:rPr lang="zh-CN" altLang="en-US" smtClean="0"/>
               <a:t>2026/10/14</a:t>
             </a:fld>
@@ -3110,7 +4896,7 @@
           <p:cNvPr id="5" name="页脚占位符 4">
             <a:extLst>
               <a:ext uri="{FF2B5EF4-FFF2-40B4-BE49-F238E27FC236}">
-                <a16:creationId xmlns:a16="http://schemas.microsoft.com/office/drawing/2014/main" id="{58121DEB-ED25-F0C0-3EAF-31602066C885}"/>
+                <a16:creationId xmlns:a16="http://schemas.microsoft.com/office/drawing/2014/main" id="{094722E3-0795-500B-E260-CAC706EEAC3D}"/>
               </a:ext>
             </a:extLst>
           </p:cNvPr>
@@ -3135,7 +4921,7 @@
           <p:cNvPr id="6" name="灯片编号占位符 5">
             <a:extLst>
               <a:ext uri="{FF2B5EF4-FFF2-40B4-BE49-F238E27FC236}">
-                <a16:creationId xmlns:a16="http://schemas.microsoft.com/office/drawing/2014/main" id="{7052FB3F-294E-FA83-C745-81193EA28083}"/>
+                <a16:creationId xmlns:a16="http://schemas.microsoft.com/office/drawing/2014/main" id="{F04CAA78-3223-AB84-7FDC-F79DE9DE2172}"/>
               </a:ext>
             </a:extLst>
           </p:cNvPr>
@@ -3151,7 +4937,7 @@
           <a:bodyPr/>
           <a:lstStyle/>
           <a:p>
-            <a:fld id="{3C2DEA8F-B415-412B-82A1-26334B4613BD}" type="slidenum">
+            <a:fld id="{07B9A03F-B064-404E-8677-51BF90BF94EA}" type="slidenum">
               <a:rPr lang="zh-CN" altLang="en-US" smtClean="0"/>
               <a:t>‹#›</a:t>
             </a:fld>
@@ -3162,7 +4948,7 @@
     </p:spTree>
     <p:extLst>
       <p:ext uri="{BB962C8B-B14F-4D97-AF65-F5344CB8AC3E}">
-        <p14:creationId xmlns:p14="http://schemas.microsoft.com/office/powerpoint/2010/main" val="4043119162"/>
+        <p14:creationId xmlns:p14="http://schemas.microsoft.com/office/powerpoint/2010/main" val="3286667475"/>
       </p:ext>
     </p:extLst>
   </p:cSld>
@@ -3194,7 +4980,7 @@
           <p:cNvPr id="2" name="标题 1">
             <a:extLst>
               <a:ext uri="{FF2B5EF4-FFF2-40B4-BE49-F238E27FC236}">
-                <a16:creationId xmlns:a16="http://schemas.microsoft.com/office/drawing/2014/main" id="{94B1809C-59FE-9131-8B1A-1779F8D3DF88}"/>
+                <a16:creationId xmlns:a16="http://schemas.microsoft.com/office/drawing/2014/main" id="{BF1A1CDE-4F6E-4F56-B83A-6E9506F4402A}"/>
               </a:ext>
             </a:extLst>
           </p:cNvPr>
@@ -3222,7 +5008,7 @@
           <p:cNvPr id="3" name="竖排文字占位符 2">
             <a:extLst>
               <a:ext uri="{FF2B5EF4-FFF2-40B4-BE49-F238E27FC236}">
-                <a16:creationId xmlns:a16="http://schemas.microsoft.com/office/drawing/2014/main" id="{B38851B1-F2D0-2B1C-71DF-8746D9A12BAD}"/>
+                <a16:creationId xmlns:a16="http://schemas.microsoft.com/office/drawing/2014/main" id="{964B263D-00F4-1527-5156-0748879D1081}"/>
               </a:ext>
             </a:extLst>
           </p:cNvPr>
@@ -3279,7 +5065,7 @@
           <p:cNvPr id="4" name="日期占位符 3">
             <a:extLst>
               <a:ext uri="{FF2B5EF4-FFF2-40B4-BE49-F238E27FC236}">
-                <a16:creationId xmlns:a16="http://schemas.microsoft.com/office/drawing/2014/main" id="{4813215C-C2C8-030D-AB9E-8238AD285344}"/>
+                <a16:creationId xmlns:a16="http://schemas.microsoft.com/office/drawing/2014/main" id="{F70A2F4D-83F2-73D6-7D0E-DEEFD4B572F9}"/>
               </a:ext>
             </a:extLst>
           </p:cNvPr>
@@ -3295,7 +5081,7 @@
           <a:bodyPr/>
           <a:lstStyle/>
           <a:p>
-            <a:fld id="{14A68783-71C6-44C0-96E1-E0D80588316A}" type="datetimeFigureOut">
+            <a:fld id="{8FDC24A8-F9FD-4E6D-9262-B054C6511475}" type="datetimeFigureOut">
               <a:rPr lang="zh-CN" altLang="en-US" smtClean="0"/>
               <a:t>2026/10/14</a:t>
             </a:fld>
@@ -3308,7 +5094,7 @@
           <p:cNvPr id="5" name="页脚占位符 4">
             <a:extLst>
               <a:ext uri="{FF2B5EF4-FFF2-40B4-BE49-F238E27FC236}">
-                <a16:creationId xmlns:a16="http://schemas.microsoft.com/office/drawing/2014/main" id="{D68955B5-3B2B-CE33-CC13-17AF8CB65465}"/>
+                <a16:creationId xmlns:a16="http://schemas.microsoft.com/office/drawing/2014/main" id="{AA8859ED-8224-3D91-3002-A73CB2954D90}"/>
               </a:ext>
             </a:extLst>
           </p:cNvPr>
@@ -3333,7 +5119,7 @@
           <p:cNvPr id="6" name="灯片编号占位符 5">
             <a:extLst>
               <a:ext uri="{FF2B5EF4-FFF2-40B4-BE49-F238E27FC236}">
-                <a16:creationId xmlns:a16="http://schemas.microsoft.com/office/drawing/2014/main" id="{232B546F-0C77-1BDE-DAD5-A2CA8FCF989C}"/>
+                <a16:creationId xmlns:a16="http://schemas.microsoft.com/office/drawing/2014/main" id="{244E590D-25D8-6DE5-1556-E1D79347ADFB}"/>
               </a:ext>
             </a:extLst>
           </p:cNvPr>
@@ -3349,7 +5135,7 @@
           <a:bodyPr/>
           <a:lstStyle/>
           <a:p>
-            <a:fld id="{3C2DEA8F-B415-412B-82A1-26334B4613BD}" type="slidenum">
+            <a:fld id="{07B9A03F-B064-404E-8677-51BF90BF94EA}" type="slidenum">
               <a:rPr lang="zh-CN" altLang="en-US" smtClean="0"/>
               <a:t>‹#›</a:t>
             </a:fld>
@@ -3360,7 +5146,7 @@
     </p:spTree>
     <p:extLst>
       <p:ext uri="{BB962C8B-B14F-4D97-AF65-F5344CB8AC3E}">
-        <p14:creationId xmlns:p14="http://schemas.microsoft.com/office/powerpoint/2010/main" val="2542955128"/>
+        <p14:creationId xmlns:p14="http://schemas.microsoft.com/office/powerpoint/2010/main" val="710623565"/>
       </p:ext>
     </p:extLst>
   </p:cSld>
@@ -3392,7 +5178,7 @@
           <p:cNvPr id="2" name="竖排标题 1">
             <a:extLst>
               <a:ext uri="{FF2B5EF4-FFF2-40B4-BE49-F238E27FC236}">
-                <a16:creationId xmlns:a16="http://schemas.microsoft.com/office/drawing/2014/main" id="{C788A301-6513-1570-EE57-48BF4E3F02AC}"/>
+                <a16:creationId xmlns:a16="http://schemas.microsoft.com/office/drawing/2014/main" id="{B8CC4CEE-BBAA-0C35-87D7-79B7615A3492}"/>
               </a:ext>
             </a:extLst>
           </p:cNvPr>
@@ -3425,7 +5211,7 @@
           <p:cNvPr id="3" name="竖排文字占位符 2">
             <a:extLst>
               <a:ext uri="{FF2B5EF4-FFF2-40B4-BE49-F238E27FC236}">
-                <a16:creationId xmlns:a16="http://schemas.microsoft.com/office/drawing/2014/main" id="{7516CE6A-BECA-2316-0EBA-86987FBA1D16}"/>
+                <a16:creationId xmlns:a16="http://schemas.microsoft.com/office/drawing/2014/main" id="{89213782-003F-7CEA-B022-E5F934B9F7C4}"/>
               </a:ext>
             </a:extLst>
           </p:cNvPr>
@@ -3487,7 +5273,7 @@
           <p:cNvPr id="4" name="日期占位符 3">
             <a:extLst>
               <a:ext uri="{FF2B5EF4-FFF2-40B4-BE49-F238E27FC236}">
-                <a16:creationId xmlns:a16="http://schemas.microsoft.com/office/drawing/2014/main" id="{8E3FE30C-1C14-6778-60B4-2A96A7DD5825}"/>
+                <a16:creationId xmlns:a16="http://schemas.microsoft.com/office/drawing/2014/main" id="{3709986D-1F0F-5C8B-094C-EACC6D6D0BCD}"/>
               </a:ext>
             </a:extLst>
           </p:cNvPr>
@@ -3503,7 +5289,7 @@
           <a:bodyPr/>
           <a:lstStyle/>
           <a:p>
-            <a:fld id="{14A68783-71C6-44C0-96E1-E0D80588316A}" type="datetimeFigureOut">
+            <a:fld id="{8FDC24A8-F9FD-4E6D-9262-B054C6511475}" type="datetimeFigureOut">
               <a:rPr lang="zh-CN" altLang="en-US" smtClean="0"/>
               <a:t>2026/10/14</a:t>
             </a:fld>
@@ -3516,7 +5302,7 @@
           <p:cNvPr id="5" name="页脚占位符 4">
             <a:extLst>
               <a:ext uri="{FF2B5EF4-FFF2-40B4-BE49-F238E27FC236}">
-                <a16:creationId xmlns:a16="http://schemas.microsoft.com/office/drawing/2014/main" id="{F413A363-59F0-05D3-8FE9-C201BD3CCC53}"/>
+                <a16:creationId xmlns:a16="http://schemas.microsoft.com/office/drawing/2014/main" id="{AF790480-BB11-FB9A-540C-BEB164B122C5}"/>
               </a:ext>
             </a:extLst>
           </p:cNvPr>
@@ -3541,7 +5327,7 @@
           <p:cNvPr id="6" name="灯片编号占位符 5">
             <a:extLst>
               <a:ext uri="{FF2B5EF4-FFF2-40B4-BE49-F238E27FC236}">
-                <a16:creationId xmlns:a16="http://schemas.microsoft.com/office/drawing/2014/main" id="{149166C9-85D5-518C-5FEF-BC40E082C6B5}"/>
+                <a16:creationId xmlns:a16="http://schemas.microsoft.com/office/drawing/2014/main" id="{55ACB7A5-A96A-0DA3-D5BC-F6683076E35D}"/>
               </a:ext>
             </a:extLst>
           </p:cNvPr>
@@ -3557,7 +5343,7 @@
           <a:bodyPr/>
           <a:lstStyle/>
           <a:p>
-            <a:fld id="{3C2DEA8F-B415-412B-82A1-26334B4613BD}" type="slidenum">
+            <a:fld id="{07B9A03F-B064-404E-8677-51BF90BF94EA}" type="slidenum">
               <a:rPr lang="zh-CN" altLang="en-US" smtClean="0"/>
               <a:t>‹#›</a:t>
             </a:fld>
@@ -3568,7 +5354,7 @@
     </p:spTree>
     <p:extLst>
       <p:ext uri="{BB962C8B-B14F-4D97-AF65-F5344CB8AC3E}">
-        <p14:creationId xmlns:p14="http://schemas.microsoft.com/office/powerpoint/2010/main" val="3734837205"/>
+        <p14:creationId xmlns:p14="http://schemas.microsoft.com/office/powerpoint/2010/main" val="3974140318"/>
       </p:ext>
     </p:extLst>
   </p:cSld>
@@ -3600,7 +5386,7 @@
           <p:cNvPr id="2" name="标题 1">
             <a:extLst>
               <a:ext uri="{FF2B5EF4-FFF2-40B4-BE49-F238E27FC236}">
-                <a16:creationId xmlns:a16="http://schemas.microsoft.com/office/drawing/2014/main" id="{B1A5BF45-6A3C-5837-B82D-90034940BD46}"/>
+                <a16:creationId xmlns:a16="http://schemas.microsoft.com/office/drawing/2014/main" id="{BB1F15E8-F4CA-596A-BD86-2DC564BB3E58}"/>
               </a:ext>
             </a:extLst>
           </p:cNvPr>
@@ -3628,7 +5414,7 @@
           <p:cNvPr id="3" name="内容占位符 2">
             <a:extLst>
               <a:ext uri="{FF2B5EF4-FFF2-40B4-BE49-F238E27FC236}">
-                <a16:creationId xmlns:a16="http://schemas.microsoft.com/office/drawing/2014/main" id="{ABBCB37F-B353-CC43-E495-2C9D8A41DB73}"/>
+                <a16:creationId xmlns:a16="http://schemas.microsoft.com/office/drawing/2014/main" id="{BD1639CA-E804-4FB2-6A9C-CE77AC2DC0E0}"/>
               </a:ext>
             </a:extLst>
           </p:cNvPr>
@@ -3685,7 +5471,7 @@
           <p:cNvPr id="4" name="日期占位符 3">
             <a:extLst>
               <a:ext uri="{FF2B5EF4-FFF2-40B4-BE49-F238E27FC236}">
-                <a16:creationId xmlns:a16="http://schemas.microsoft.com/office/drawing/2014/main" id="{158143E5-37FF-6442-6268-5501BDA2D70F}"/>
+                <a16:creationId xmlns:a16="http://schemas.microsoft.com/office/drawing/2014/main" id="{70E63A81-AA3C-2A12-5955-C2E28A6A3300}"/>
               </a:ext>
             </a:extLst>
           </p:cNvPr>
@@ -3701,7 +5487,7 @@
           <a:bodyPr/>
           <a:lstStyle/>
           <a:p>
-            <a:fld id="{14A68783-71C6-44C0-96E1-E0D80588316A}" type="datetimeFigureOut">
+            <a:fld id="{8FDC24A8-F9FD-4E6D-9262-B054C6511475}" type="datetimeFigureOut">
               <a:rPr lang="zh-CN" altLang="en-US" smtClean="0"/>
               <a:t>2026/10/14</a:t>
             </a:fld>
@@ -3714,7 +5500,7 @@
           <p:cNvPr id="5" name="页脚占位符 4">
             <a:extLst>
               <a:ext uri="{FF2B5EF4-FFF2-40B4-BE49-F238E27FC236}">
-                <a16:creationId xmlns:a16="http://schemas.microsoft.com/office/drawing/2014/main" id="{409CFD6E-ED5F-5F57-458C-4C2275E5D269}"/>
+                <a16:creationId xmlns:a16="http://schemas.microsoft.com/office/drawing/2014/main" id="{5F74BC54-E523-AC57-810D-956E207D847E}"/>
               </a:ext>
             </a:extLst>
           </p:cNvPr>
@@ -3739,7 +5525,7 @@
           <p:cNvPr id="6" name="灯片编号占位符 5">
             <a:extLst>
               <a:ext uri="{FF2B5EF4-FFF2-40B4-BE49-F238E27FC236}">
-                <a16:creationId xmlns:a16="http://schemas.microsoft.com/office/drawing/2014/main" id="{C2EEC5CD-6708-4991-6DBE-B24630565041}"/>
+                <a16:creationId xmlns:a16="http://schemas.microsoft.com/office/drawing/2014/main" id="{330F37A3-FA27-B73C-5075-7A68BF952E29}"/>
               </a:ext>
             </a:extLst>
           </p:cNvPr>
@@ -3755,7 +5541,7 @@
           <a:bodyPr/>
           <a:lstStyle/>
           <a:p>
-            <a:fld id="{3C2DEA8F-B415-412B-82A1-26334B4613BD}" type="slidenum">
+            <a:fld id="{07B9A03F-B064-404E-8677-51BF90BF94EA}" type="slidenum">
               <a:rPr lang="zh-CN" altLang="en-US" smtClean="0"/>
               <a:t>‹#›</a:t>
             </a:fld>
@@ -3766,7 +5552,7 @@
     </p:spTree>
     <p:extLst>
       <p:ext uri="{BB962C8B-B14F-4D97-AF65-F5344CB8AC3E}">
-        <p14:creationId xmlns:p14="http://schemas.microsoft.com/office/powerpoint/2010/main" val="3868822453"/>
+        <p14:creationId xmlns:p14="http://schemas.microsoft.com/office/powerpoint/2010/main" val="1497481842"/>
       </p:ext>
     </p:extLst>
   </p:cSld>
@@ -3798,7 +5584,7 @@
           <p:cNvPr id="2" name="标题 1">
             <a:extLst>
               <a:ext uri="{FF2B5EF4-FFF2-40B4-BE49-F238E27FC236}">
-                <a16:creationId xmlns:a16="http://schemas.microsoft.com/office/drawing/2014/main" id="{77061724-224F-F4E1-6CA5-0ABAA157920E}"/>
+                <a16:creationId xmlns:a16="http://schemas.microsoft.com/office/drawing/2014/main" id="{C39BBB7F-B664-7C5C-D0E3-133170A62B5F}"/>
               </a:ext>
             </a:extLst>
           </p:cNvPr>
@@ -3835,7 +5621,7 @@
           <p:cNvPr id="3" name="文本占位符 2">
             <a:extLst>
               <a:ext uri="{FF2B5EF4-FFF2-40B4-BE49-F238E27FC236}">
-                <a16:creationId xmlns:a16="http://schemas.microsoft.com/office/drawing/2014/main" id="{50552517-0BDE-0CC4-46F2-A902BDC61E4E}"/>
+                <a16:creationId xmlns:a16="http://schemas.microsoft.com/office/drawing/2014/main" id="{98CE3765-6D41-B68B-23DE-95B50DF8AA3D}"/>
               </a:ext>
             </a:extLst>
           </p:cNvPr>
@@ -3960,7 +5746,7 @@
           <p:cNvPr id="4" name="日期占位符 3">
             <a:extLst>
               <a:ext uri="{FF2B5EF4-FFF2-40B4-BE49-F238E27FC236}">
-                <a16:creationId xmlns:a16="http://schemas.microsoft.com/office/drawing/2014/main" id="{02C4082D-DCB8-DB65-A55A-13D81DD971AB}"/>
+                <a16:creationId xmlns:a16="http://schemas.microsoft.com/office/drawing/2014/main" id="{B5D9CE69-066D-4566-11D5-0DCE76BFCA0B}"/>
               </a:ext>
             </a:extLst>
           </p:cNvPr>
@@ -3976,7 +5762,7 @@
           <a:bodyPr/>
           <a:lstStyle/>
           <a:p>
-            <a:fld id="{14A68783-71C6-44C0-96E1-E0D80588316A}" type="datetimeFigureOut">
+            <a:fld id="{8FDC24A8-F9FD-4E6D-9262-B054C6511475}" type="datetimeFigureOut">
               <a:rPr lang="zh-CN" altLang="en-US" smtClean="0"/>
               <a:t>2026/10/14</a:t>
             </a:fld>
@@ -3989,7 +5775,7 @@
           <p:cNvPr id="5" name="页脚占位符 4">
             <a:extLst>
               <a:ext uri="{FF2B5EF4-FFF2-40B4-BE49-F238E27FC236}">
-                <a16:creationId xmlns:a16="http://schemas.microsoft.com/office/drawing/2014/main" id="{E086DFC3-6ED5-F573-015E-41F487A796A9}"/>
+                <a16:creationId xmlns:a16="http://schemas.microsoft.com/office/drawing/2014/main" id="{E7B26F31-279E-89A6-5C9F-36F38DF8F67F}"/>
               </a:ext>
             </a:extLst>
           </p:cNvPr>
@@ -4014,7 +5800,7 @@
           <p:cNvPr id="6" name="灯片编号占位符 5">
             <a:extLst>
               <a:ext uri="{FF2B5EF4-FFF2-40B4-BE49-F238E27FC236}">
-                <a16:creationId xmlns:a16="http://schemas.microsoft.com/office/drawing/2014/main" id="{A07C0998-6DDF-146B-0012-CACC9C6550EF}"/>
+                <a16:creationId xmlns:a16="http://schemas.microsoft.com/office/drawing/2014/main" id="{4A4FFA30-48A2-BEAD-FAA6-49C01559A636}"/>
               </a:ext>
             </a:extLst>
           </p:cNvPr>
@@ -4030,7 +5816,7 @@
           <a:bodyPr/>
           <a:lstStyle/>
           <a:p>
-            <a:fld id="{3C2DEA8F-B415-412B-82A1-26334B4613BD}" type="slidenum">
+            <a:fld id="{07B9A03F-B064-404E-8677-51BF90BF94EA}" type="slidenum">
               <a:rPr lang="zh-CN" altLang="en-US" smtClean="0"/>
               <a:t>‹#›</a:t>
             </a:fld>
@@ -4041,7 +5827,7 @@
     </p:spTree>
     <p:extLst>
       <p:ext uri="{BB962C8B-B14F-4D97-AF65-F5344CB8AC3E}">
-        <p14:creationId xmlns:p14="http://schemas.microsoft.com/office/powerpoint/2010/main" val="554959687"/>
+        <p14:creationId xmlns:p14="http://schemas.microsoft.com/office/powerpoint/2010/main" val="1081050992"/>
       </p:ext>
     </p:extLst>
   </p:cSld>
@@ -4073,7 +5859,7 @@
           <p:cNvPr id="2" name="标题 1">
             <a:extLst>
               <a:ext uri="{FF2B5EF4-FFF2-40B4-BE49-F238E27FC236}">
-                <a16:creationId xmlns:a16="http://schemas.microsoft.com/office/drawing/2014/main" id="{024808C6-694A-5F9F-FE06-13C9FCDEA8B0}"/>
+                <a16:creationId xmlns:a16="http://schemas.microsoft.com/office/drawing/2014/main" id="{7DC025C6-FF6D-DE83-B1F1-4F46C7D72EF6}"/>
               </a:ext>
             </a:extLst>
           </p:cNvPr>
@@ -4101,7 +5887,7 @@
           <p:cNvPr id="3" name="内容占位符 2">
             <a:extLst>
               <a:ext uri="{FF2B5EF4-FFF2-40B4-BE49-F238E27FC236}">
-                <a16:creationId xmlns:a16="http://schemas.microsoft.com/office/drawing/2014/main" id="{5544D8F5-944B-FF33-A0D4-B6A343DB8FAB}"/>
+                <a16:creationId xmlns:a16="http://schemas.microsoft.com/office/drawing/2014/main" id="{928B024D-EF0B-9905-243C-C07037D53727}"/>
               </a:ext>
             </a:extLst>
           </p:cNvPr>
@@ -4163,7 +5949,7 @@
           <p:cNvPr id="4" name="内容占位符 3">
             <a:extLst>
               <a:ext uri="{FF2B5EF4-FFF2-40B4-BE49-F238E27FC236}">
-                <a16:creationId xmlns:a16="http://schemas.microsoft.com/office/drawing/2014/main" id="{C7349A99-B428-1678-BC80-6848385763E7}"/>
+                <a16:creationId xmlns:a16="http://schemas.microsoft.com/office/drawing/2014/main" id="{8A37CAE9-94AA-EFD2-4B4C-CAEB0ABAFBE2}"/>
               </a:ext>
             </a:extLst>
           </p:cNvPr>
@@ -4225,7 +6011,7 @@
           <p:cNvPr id="5" name="日期占位符 4">
             <a:extLst>
               <a:ext uri="{FF2B5EF4-FFF2-40B4-BE49-F238E27FC236}">
-                <a16:creationId xmlns:a16="http://schemas.microsoft.com/office/drawing/2014/main" id="{BA3C7F33-72C1-6EDB-5C20-8A4DDEA0B6FE}"/>
+                <a16:creationId xmlns:a16="http://schemas.microsoft.com/office/drawing/2014/main" id="{267BD63D-D680-3F79-295A-855E2D1960DF}"/>
               </a:ext>
             </a:extLst>
           </p:cNvPr>
@@ -4241,7 +6027,7 @@
           <a:bodyPr/>
           <a:lstStyle/>
           <a:p>
-            <a:fld id="{14A68783-71C6-44C0-96E1-E0D80588316A}" type="datetimeFigureOut">
+            <a:fld id="{8FDC24A8-F9FD-4E6D-9262-B054C6511475}" type="datetimeFigureOut">
               <a:rPr lang="zh-CN" altLang="en-US" smtClean="0"/>
               <a:t>2026/10/14</a:t>
             </a:fld>
@@ -4254,7 +6040,7 @@
           <p:cNvPr id="6" name="页脚占位符 5">
             <a:extLst>
               <a:ext uri="{FF2B5EF4-FFF2-40B4-BE49-F238E27FC236}">
-                <a16:creationId xmlns:a16="http://schemas.microsoft.com/office/drawing/2014/main" id="{C96B508E-11F3-63E9-11AD-555D99222534}"/>
+                <a16:creationId xmlns:a16="http://schemas.microsoft.com/office/drawing/2014/main" id="{6C13315B-2B4D-78EC-C4B4-A2867D092272}"/>
               </a:ext>
             </a:extLst>
           </p:cNvPr>
@@ -4279,7 +6065,7 @@
           <p:cNvPr id="7" name="灯片编号占位符 6">
             <a:extLst>
               <a:ext uri="{FF2B5EF4-FFF2-40B4-BE49-F238E27FC236}">
-                <a16:creationId xmlns:a16="http://schemas.microsoft.com/office/drawing/2014/main" id="{E965AA56-0EF0-4660-7BAF-A4A4F0749139}"/>
+                <a16:creationId xmlns:a16="http://schemas.microsoft.com/office/drawing/2014/main" id="{B3ABFEBC-09C5-A17C-CDDF-73E5F54AEB10}"/>
               </a:ext>
             </a:extLst>
           </p:cNvPr>
@@ -4295,7 +6081,7 @@
           <a:bodyPr/>
           <a:lstStyle/>
           <a:p>
-            <a:fld id="{3C2DEA8F-B415-412B-82A1-26334B4613BD}" type="slidenum">
+            <a:fld id="{07B9A03F-B064-404E-8677-51BF90BF94EA}" type="slidenum">
               <a:rPr lang="zh-CN" altLang="en-US" smtClean="0"/>
               <a:t>‹#›</a:t>
             </a:fld>
@@ -4306,7 +6092,7 @@
     </p:spTree>
     <p:extLst>
       <p:ext uri="{BB962C8B-B14F-4D97-AF65-F5344CB8AC3E}">
-        <p14:creationId xmlns:p14="http://schemas.microsoft.com/office/powerpoint/2010/main" val="2994596365"/>
+        <p14:creationId xmlns:p14="http://schemas.microsoft.com/office/powerpoint/2010/main" val="495201152"/>
       </p:ext>
     </p:extLst>
   </p:cSld>
@@ -4338,7 +6124,7 @@
           <p:cNvPr id="2" name="标题 1">
             <a:extLst>
               <a:ext uri="{FF2B5EF4-FFF2-40B4-BE49-F238E27FC236}">
-                <a16:creationId xmlns:a16="http://schemas.microsoft.com/office/drawing/2014/main" id="{F03CA0DD-2745-440D-8BCD-739CA227B170}"/>
+                <a16:creationId xmlns:a16="http://schemas.microsoft.com/office/drawing/2014/main" id="{0430797E-BD2B-004F-0E44-09D202227289}"/>
               </a:ext>
             </a:extLst>
           </p:cNvPr>
@@ -4371,7 +6157,7 @@
           <p:cNvPr id="3" name="文本占位符 2">
             <a:extLst>
               <a:ext uri="{FF2B5EF4-FFF2-40B4-BE49-F238E27FC236}">
-                <a16:creationId xmlns:a16="http://schemas.microsoft.com/office/drawing/2014/main" id="{E18836B6-E2A5-CD99-4EEE-2ADECF6DF3E5}"/>
+                <a16:creationId xmlns:a16="http://schemas.microsoft.com/office/drawing/2014/main" id="{E4506986-0325-1312-C8E9-C8FF9044496E}"/>
               </a:ext>
             </a:extLst>
           </p:cNvPr>
@@ -4442,7 +6228,7 @@
           <p:cNvPr id="4" name="内容占位符 3">
             <a:extLst>
               <a:ext uri="{FF2B5EF4-FFF2-40B4-BE49-F238E27FC236}">
-                <a16:creationId xmlns:a16="http://schemas.microsoft.com/office/drawing/2014/main" id="{8D1476DE-580E-C507-C925-DC23969C1138}"/>
+                <a16:creationId xmlns:a16="http://schemas.microsoft.com/office/drawing/2014/main" id="{E5E7C48D-A021-B96E-0D39-D60629B0BC0B}"/>
               </a:ext>
             </a:extLst>
           </p:cNvPr>
@@ -4504,7 +6290,7 @@
           <p:cNvPr id="5" name="文本占位符 4">
             <a:extLst>
               <a:ext uri="{FF2B5EF4-FFF2-40B4-BE49-F238E27FC236}">
-                <a16:creationId xmlns:a16="http://schemas.microsoft.com/office/drawing/2014/main" id="{A011922E-CA3A-907E-C184-117659C4853A}"/>
+                <a16:creationId xmlns:a16="http://schemas.microsoft.com/office/drawing/2014/main" id="{A2451469-C757-64D6-4B72-9EAD0BAF37E0}"/>
               </a:ext>
             </a:extLst>
           </p:cNvPr>
@@ -4575,7 +6361,7 @@
           <p:cNvPr id="6" name="内容占位符 5">
             <a:extLst>
               <a:ext uri="{FF2B5EF4-FFF2-40B4-BE49-F238E27FC236}">
-                <a16:creationId xmlns:a16="http://schemas.microsoft.com/office/drawing/2014/main" id="{548C8987-3F53-D1A4-69E5-A9F42ABB378D}"/>
+                <a16:creationId xmlns:a16="http://schemas.microsoft.com/office/drawing/2014/main" id="{7B81195E-56B7-FAD7-422C-106EFE5AB2CE}"/>
               </a:ext>
             </a:extLst>
           </p:cNvPr>
@@ -4637,7 +6423,7 @@
           <p:cNvPr id="7" name="日期占位符 6">
             <a:extLst>
               <a:ext uri="{FF2B5EF4-FFF2-40B4-BE49-F238E27FC236}">
-                <a16:creationId xmlns:a16="http://schemas.microsoft.com/office/drawing/2014/main" id="{33233EF2-E4D0-4E29-BB4C-421A0CA44984}"/>
+                <a16:creationId xmlns:a16="http://schemas.microsoft.com/office/drawing/2014/main" id="{D9C6F476-B461-32D4-9459-CADA045B6F1C}"/>
               </a:ext>
             </a:extLst>
           </p:cNvPr>
@@ -4653,7 +6439,7 @@
           <a:bodyPr/>
           <a:lstStyle/>
           <a:p>
-            <a:fld id="{14A68783-71C6-44C0-96E1-E0D80588316A}" type="datetimeFigureOut">
+            <a:fld id="{8FDC24A8-F9FD-4E6D-9262-B054C6511475}" type="datetimeFigureOut">
               <a:rPr lang="zh-CN" altLang="en-US" smtClean="0"/>
               <a:t>2026/10/14</a:t>
             </a:fld>
@@ -4666,7 +6452,7 @@
           <p:cNvPr id="8" name="页脚占位符 7">
             <a:extLst>
               <a:ext uri="{FF2B5EF4-FFF2-40B4-BE49-F238E27FC236}">
-                <a16:creationId xmlns:a16="http://schemas.microsoft.com/office/drawing/2014/main" id="{587A1ECB-0248-022D-49EB-AE907D83EDC1}"/>
+                <a16:creationId xmlns:a16="http://schemas.microsoft.com/office/drawing/2014/main" id="{A3D8F953-323D-B1FD-FB92-FD87E8AEEED6}"/>
               </a:ext>
             </a:extLst>
           </p:cNvPr>
@@ -4691,7 +6477,7 @@
           <p:cNvPr id="9" name="灯片编号占位符 8">
             <a:extLst>
               <a:ext uri="{FF2B5EF4-FFF2-40B4-BE49-F238E27FC236}">
-                <a16:creationId xmlns:a16="http://schemas.microsoft.com/office/drawing/2014/main" id="{B8690275-204B-6C86-8AE9-25174427615F}"/>
+                <a16:creationId xmlns:a16="http://schemas.microsoft.com/office/drawing/2014/main" id="{272D4DB9-19C4-BCD5-E87D-2954A1E854A5}"/>
               </a:ext>
             </a:extLst>
           </p:cNvPr>
@@ -4707,7 +6493,7 @@
           <a:bodyPr/>
           <a:lstStyle/>
           <a:p>
-            <a:fld id="{3C2DEA8F-B415-412B-82A1-26334B4613BD}" type="slidenum">
+            <a:fld id="{07B9A03F-B064-404E-8677-51BF90BF94EA}" type="slidenum">
               <a:rPr lang="zh-CN" altLang="en-US" smtClean="0"/>
               <a:t>‹#›</a:t>
             </a:fld>
@@ -4718,7 +6504,7 @@
     </p:spTree>
     <p:extLst>
       <p:ext uri="{BB962C8B-B14F-4D97-AF65-F5344CB8AC3E}">
-        <p14:creationId xmlns:p14="http://schemas.microsoft.com/office/powerpoint/2010/main" val="2392599288"/>
+        <p14:creationId xmlns:p14="http://schemas.microsoft.com/office/powerpoint/2010/main" val="3846141968"/>
       </p:ext>
     </p:extLst>
   </p:cSld>
@@ -4750,7 +6536,7 @@
           <p:cNvPr id="2" name="标题 1">
             <a:extLst>
               <a:ext uri="{FF2B5EF4-FFF2-40B4-BE49-F238E27FC236}">
-                <a16:creationId xmlns:a16="http://schemas.microsoft.com/office/drawing/2014/main" id="{98C22165-E4C6-DD12-AA12-307116D26C80}"/>
+                <a16:creationId xmlns:a16="http://schemas.microsoft.com/office/drawing/2014/main" id="{5B1FE7B6-2CFC-3708-5713-4B3ADE244BCB}"/>
               </a:ext>
             </a:extLst>
           </p:cNvPr>
@@ -4778,7 +6564,7 @@
           <p:cNvPr id="3" name="日期占位符 2">
             <a:extLst>
               <a:ext uri="{FF2B5EF4-FFF2-40B4-BE49-F238E27FC236}">
-                <a16:creationId xmlns:a16="http://schemas.microsoft.com/office/drawing/2014/main" id="{BDEEC5CD-2A37-477B-85BC-F376AC632139}"/>
+                <a16:creationId xmlns:a16="http://schemas.microsoft.com/office/drawing/2014/main" id="{1D7347F6-D005-47E7-F1C6-37C0ABB89189}"/>
               </a:ext>
             </a:extLst>
           </p:cNvPr>
@@ -4794,7 +6580,7 @@
           <a:bodyPr/>
           <a:lstStyle/>
           <a:p>
-            <a:fld id="{14A68783-71C6-44C0-96E1-E0D80588316A}" type="datetimeFigureOut">
+            <a:fld id="{8FDC24A8-F9FD-4E6D-9262-B054C6511475}" type="datetimeFigureOut">
               <a:rPr lang="zh-CN" altLang="en-US" smtClean="0"/>
               <a:t>2026/10/14</a:t>
             </a:fld>
@@ -4807,7 +6593,7 @@
           <p:cNvPr id="4" name="页脚占位符 3">
             <a:extLst>
               <a:ext uri="{FF2B5EF4-FFF2-40B4-BE49-F238E27FC236}">
-                <a16:creationId xmlns:a16="http://schemas.microsoft.com/office/drawing/2014/main" id="{AB352CF6-C6B8-056A-7415-B81DA4CA460C}"/>
+                <a16:creationId xmlns:a16="http://schemas.microsoft.com/office/drawing/2014/main" id="{6134724E-7F2A-B7CB-D4C5-748CF58A6B50}"/>
               </a:ext>
             </a:extLst>
           </p:cNvPr>
@@ -4832,7 +6618,7 @@
           <p:cNvPr id="5" name="灯片编号占位符 4">
             <a:extLst>
               <a:ext uri="{FF2B5EF4-FFF2-40B4-BE49-F238E27FC236}">
-                <a16:creationId xmlns:a16="http://schemas.microsoft.com/office/drawing/2014/main" id="{CA45AF0D-B55B-ACBD-DA11-418F1F7F9CB7}"/>
+                <a16:creationId xmlns:a16="http://schemas.microsoft.com/office/drawing/2014/main" id="{0E59BFBD-59A0-AE6F-4E58-700D1C37D050}"/>
               </a:ext>
             </a:extLst>
           </p:cNvPr>
@@ -4848,7 +6634,7 @@
           <a:bodyPr/>
           <a:lstStyle/>
           <a:p>
-            <a:fld id="{3C2DEA8F-B415-412B-82A1-26334B4613BD}" type="slidenum">
+            <a:fld id="{07B9A03F-B064-404E-8677-51BF90BF94EA}" type="slidenum">
               <a:rPr lang="zh-CN" altLang="en-US" smtClean="0"/>
               <a:t>‹#›</a:t>
             </a:fld>
@@ -4859,7 +6645,7 @@
     </p:spTree>
     <p:extLst>
       <p:ext uri="{BB962C8B-B14F-4D97-AF65-F5344CB8AC3E}">
-        <p14:creationId xmlns:p14="http://schemas.microsoft.com/office/powerpoint/2010/main" val="2470767654"/>
+        <p14:creationId xmlns:p14="http://schemas.microsoft.com/office/powerpoint/2010/main" val="2612888617"/>
       </p:ext>
     </p:extLst>
   </p:cSld>
@@ -4891,7 +6677,7 @@
           <p:cNvPr id="2" name="日期占位符 1">
             <a:extLst>
               <a:ext uri="{FF2B5EF4-FFF2-40B4-BE49-F238E27FC236}">
-                <a16:creationId xmlns:a16="http://schemas.microsoft.com/office/drawing/2014/main" id="{BBFFF15A-9560-204B-44F3-5D0AEB52755F}"/>
+                <a16:creationId xmlns:a16="http://schemas.microsoft.com/office/drawing/2014/main" id="{BC87FDD9-18E7-37D8-3CB9-3ABB7BBCC228}"/>
               </a:ext>
             </a:extLst>
           </p:cNvPr>
@@ -4907,7 +6693,7 @@
           <a:bodyPr/>
           <a:lstStyle/>
           <a:p>
-            <a:fld id="{14A68783-71C6-44C0-96E1-E0D80588316A}" type="datetimeFigureOut">
+            <a:fld id="{8FDC24A8-F9FD-4E6D-9262-B054C6511475}" type="datetimeFigureOut">
               <a:rPr lang="zh-CN" altLang="en-US" smtClean="0"/>
               <a:t>2026/10/14</a:t>
             </a:fld>
@@ -4920,7 +6706,7 @@
           <p:cNvPr id="3" name="页脚占位符 2">
             <a:extLst>
               <a:ext uri="{FF2B5EF4-FFF2-40B4-BE49-F238E27FC236}">
-                <a16:creationId xmlns:a16="http://schemas.microsoft.com/office/drawing/2014/main" id="{F5423A63-2D53-F625-C6E1-8E933F66C20C}"/>
+                <a16:creationId xmlns:a16="http://schemas.microsoft.com/office/drawing/2014/main" id="{E2E675FD-9984-4295-80CE-C352ACB8FDCF}"/>
               </a:ext>
             </a:extLst>
           </p:cNvPr>
@@ -4945,7 +6731,7 @@
           <p:cNvPr id="4" name="灯片编号占位符 3">
             <a:extLst>
               <a:ext uri="{FF2B5EF4-FFF2-40B4-BE49-F238E27FC236}">
-                <a16:creationId xmlns:a16="http://schemas.microsoft.com/office/drawing/2014/main" id="{0566ACBE-0695-36D7-BA3D-01BAF802853F}"/>
+                <a16:creationId xmlns:a16="http://schemas.microsoft.com/office/drawing/2014/main" id="{6E6E676F-7F07-83B4-DD51-C4F140788DEF}"/>
               </a:ext>
             </a:extLst>
           </p:cNvPr>
@@ -4961,7 +6747,7 @@
           <a:bodyPr/>
           <a:lstStyle/>
           <a:p>
-            <a:fld id="{3C2DEA8F-B415-412B-82A1-26334B4613BD}" type="slidenum">
+            <a:fld id="{07B9A03F-B064-404E-8677-51BF90BF94EA}" type="slidenum">
               <a:rPr lang="zh-CN" altLang="en-US" smtClean="0"/>
               <a:t>‹#›</a:t>
             </a:fld>
@@ -4972,7 +6758,7 @@
     </p:spTree>
     <p:extLst>
       <p:ext uri="{BB962C8B-B14F-4D97-AF65-F5344CB8AC3E}">
-        <p14:creationId xmlns:p14="http://schemas.microsoft.com/office/powerpoint/2010/main" val="1692083625"/>
+        <p14:creationId xmlns:p14="http://schemas.microsoft.com/office/powerpoint/2010/main" val="719327417"/>
       </p:ext>
     </p:extLst>
   </p:cSld>
@@ -5004,7 +6790,7 @@
           <p:cNvPr id="2" name="标题 1">
             <a:extLst>
               <a:ext uri="{FF2B5EF4-FFF2-40B4-BE49-F238E27FC236}">
-                <a16:creationId xmlns:a16="http://schemas.microsoft.com/office/drawing/2014/main" id="{62CE3622-5C46-0D76-4D7C-98D55F68B1C6}"/>
+                <a16:creationId xmlns:a16="http://schemas.microsoft.com/office/drawing/2014/main" id="{50EC1D82-8551-125B-1A89-DD23215C8674}"/>
               </a:ext>
             </a:extLst>
           </p:cNvPr>
@@ -5041,7 +6827,7 @@
           <p:cNvPr id="3" name="内容占位符 2">
             <a:extLst>
               <a:ext uri="{FF2B5EF4-FFF2-40B4-BE49-F238E27FC236}">
-                <a16:creationId xmlns:a16="http://schemas.microsoft.com/office/drawing/2014/main" id="{699C2160-05E7-DCB0-28D8-AFCEA8E40618}"/>
+                <a16:creationId xmlns:a16="http://schemas.microsoft.com/office/drawing/2014/main" id="{4548A103-33A8-E3F8-33CF-3E27A710601A}"/>
               </a:ext>
             </a:extLst>
           </p:cNvPr>
@@ -5131,7 +6917,7 @@
           <p:cNvPr id="4" name="文本占位符 3">
             <a:extLst>
               <a:ext uri="{FF2B5EF4-FFF2-40B4-BE49-F238E27FC236}">
-                <a16:creationId xmlns:a16="http://schemas.microsoft.com/office/drawing/2014/main" id="{696D57FF-763C-B7B9-2C1F-2C1B0A9AEF4C}"/>
+                <a16:creationId xmlns:a16="http://schemas.microsoft.com/office/drawing/2014/main" id="{BDF1E381-F7D9-4D4A-E500-DEDBB25AB374}"/>
               </a:ext>
             </a:extLst>
           </p:cNvPr>
@@ -5202,7 +6988,7 @@
           <p:cNvPr id="5" name="日期占位符 4">
             <a:extLst>
               <a:ext uri="{FF2B5EF4-FFF2-40B4-BE49-F238E27FC236}">
-                <a16:creationId xmlns:a16="http://schemas.microsoft.com/office/drawing/2014/main" id="{9A16D28D-F270-BFDB-F749-E4E23DF1C7C6}"/>
+                <a16:creationId xmlns:a16="http://schemas.microsoft.com/office/drawing/2014/main" id="{C3995013-1189-5CA1-A39C-EAA8BD9AE398}"/>
               </a:ext>
             </a:extLst>
           </p:cNvPr>
@@ -5218,7 +7004,7 @@
           <a:bodyPr/>
           <a:lstStyle/>
           <a:p>
-            <a:fld id="{14A68783-71C6-44C0-96E1-E0D80588316A}" type="datetimeFigureOut">
+            <a:fld id="{8FDC24A8-F9FD-4E6D-9262-B054C6511475}" type="datetimeFigureOut">
               <a:rPr lang="zh-CN" altLang="en-US" smtClean="0"/>
               <a:t>2026/10/14</a:t>
             </a:fld>
@@ -5231,7 +7017,7 @@
           <p:cNvPr id="6" name="页脚占位符 5">
             <a:extLst>
               <a:ext uri="{FF2B5EF4-FFF2-40B4-BE49-F238E27FC236}">
-                <a16:creationId xmlns:a16="http://schemas.microsoft.com/office/drawing/2014/main" id="{FB49FFE3-FD0E-FA2C-69A4-3CD882A29F67}"/>
+                <a16:creationId xmlns:a16="http://schemas.microsoft.com/office/drawing/2014/main" id="{B0FCC905-FB3D-1E6B-2652-779E324D228E}"/>
               </a:ext>
             </a:extLst>
           </p:cNvPr>
@@ -5256,7 +7042,7 @@
           <p:cNvPr id="7" name="灯片编号占位符 6">
             <a:extLst>
               <a:ext uri="{FF2B5EF4-FFF2-40B4-BE49-F238E27FC236}">
-                <a16:creationId xmlns:a16="http://schemas.microsoft.com/office/drawing/2014/main" id="{D6CF643F-8595-F963-0E60-0788409AE2CB}"/>
+                <a16:creationId xmlns:a16="http://schemas.microsoft.com/office/drawing/2014/main" id="{1111558F-7E66-8398-49AB-F13C1DBA0E32}"/>
               </a:ext>
             </a:extLst>
           </p:cNvPr>
@@ -5272,7 +7058,7 @@
           <a:bodyPr/>
           <a:lstStyle/>
           <a:p>
-            <a:fld id="{3C2DEA8F-B415-412B-82A1-26334B4613BD}" type="slidenum">
+            <a:fld id="{07B9A03F-B064-404E-8677-51BF90BF94EA}" type="slidenum">
               <a:rPr lang="zh-CN" altLang="en-US" smtClean="0"/>
               <a:t>‹#›</a:t>
             </a:fld>
@@ -5283,7 +7069,7 @@
     </p:spTree>
     <p:extLst>
       <p:ext uri="{BB962C8B-B14F-4D97-AF65-F5344CB8AC3E}">
-        <p14:creationId xmlns:p14="http://schemas.microsoft.com/office/powerpoint/2010/main" val="2938680687"/>
+        <p14:creationId xmlns:p14="http://schemas.microsoft.com/office/powerpoint/2010/main" val="1792126542"/>
       </p:ext>
     </p:extLst>
   </p:cSld>
@@ -5315,7 +7101,7 @@
           <p:cNvPr id="2" name="标题 1">
             <a:extLst>
               <a:ext uri="{FF2B5EF4-FFF2-40B4-BE49-F238E27FC236}">
-                <a16:creationId xmlns:a16="http://schemas.microsoft.com/office/drawing/2014/main" id="{B7EE92F2-792B-BA6F-F1E0-87E172BB5069}"/>
+                <a16:creationId xmlns:a16="http://schemas.microsoft.com/office/drawing/2014/main" id="{65890079-5F73-CD85-555D-87DAB7563D94}"/>
               </a:ext>
             </a:extLst>
           </p:cNvPr>
@@ -5352,7 +7138,7 @@
           <p:cNvPr id="3" name="图片占位符 2">
             <a:extLst>
               <a:ext uri="{FF2B5EF4-FFF2-40B4-BE49-F238E27FC236}">
-                <a16:creationId xmlns:a16="http://schemas.microsoft.com/office/drawing/2014/main" id="{4683FD7B-6802-6220-EAB2-58754BDA1F73}"/>
+                <a16:creationId xmlns:a16="http://schemas.microsoft.com/office/drawing/2014/main" id="{794246F0-98F0-3630-A9B0-128B43EAE527}"/>
               </a:ext>
             </a:extLst>
           </p:cNvPr>
@@ -5419,7 +7205,7 @@
           <p:cNvPr id="4" name="文本占位符 3">
             <a:extLst>
               <a:ext uri="{FF2B5EF4-FFF2-40B4-BE49-F238E27FC236}">
-                <a16:creationId xmlns:a16="http://schemas.microsoft.com/office/drawing/2014/main" id="{31176851-CB0A-9EA5-17D1-AA72D0C9F532}"/>
+                <a16:creationId xmlns:a16="http://schemas.microsoft.com/office/drawing/2014/main" id="{D1BA56F9-0F3D-6445-4A0B-56D5C70A7A7C}"/>
               </a:ext>
             </a:extLst>
           </p:cNvPr>
@@ -5490,7 +7276,7 @@
           <p:cNvPr id="5" name="日期占位符 4">
             <a:extLst>
               <a:ext uri="{FF2B5EF4-FFF2-40B4-BE49-F238E27FC236}">
-                <a16:creationId xmlns:a16="http://schemas.microsoft.com/office/drawing/2014/main" id="{1799E192-0C41-42CF-AF78-CD1DC464CF20}"/>
+                <a16:creationId xmlns:a16="http://schemas.microsoft.com/office/drawing/2014/main" id="{750E555A-AB70-0C07-76A2-1029D4D5215A}"/>
               </a:ext>
             </a:extLst>
           </p:cNvPr>
@@ -5506,7 +7292,7 @@
           <a:bodyPr/>
           <a:lstStyle/>
           <a:p>
-            <a:fld id="{14A68783-71C6-44C0-96E1-E0D80588316A}" type="datetimeFigureOut">
+            <a:fld id="{8FDC24A8-F9FD-4E6D-9262-B054C6511475}" type="datetimeFigureOut">
               <a:rPr lang="zh-CN" altLang="en-US" smtClean="0"/>
               <a:t>2026/10/14</a:t>
             </a:fld>
@@ -5519,7 +7305,7 @@
           <p:cNvPr id="6" name="页脚占位符 5">
             <a:extLst>
               <a:ext uri="{FF2B5EF4-FFF2-40B4-BE49-F238E27FC236}">
-                <a16:creationId xmlns:a16="http://schemas.microsoft.com/office/drawing/2014/main" id="{C62941D2-F6F4-D441-A80E-070044276795}"/>
+                <a16:creationId xmlns:a16="http://schemas.microsoft.com/office/drawing/2014/main" id="{FCA2BB71-2394-5853-BF47-A4C14603051F}"/>
               </a:ext>
             </a:extLst>
           </p:cNvPr>
@@ -5544,7 +7330,7 @@
           <p:cNvPr id="7" name="灯片编号占位符 6">
             <a:extLst>
               <a:ext uri="{FF2B5EF4-FFF2-40B4-BE49-F238E27FC236}">
-                <a16:creationId xmlns:a16="http://schemas.microsoft.com/office/drawing/2014/main" id="{F723B2D5-CD1C-C801-23E1-96D6D6E0E93A}"/>
+                <a16:creationId xmlns:a16="http://schemas.microsoft.com/office/drawing/2014/main" id="{DAE8BE8A-B0A5-A310-325B-FCF2A3B7ED56}"/>
               </a:ext>
             </a:extLst>
           </p:cNvPr>
@@ -5560,7 +7346,7 @@
           <a:bodyPr/>
           <a:lstStyle/>
           <a:p>
-            <a:fld id="{3C2DEA8F-B415-412B-82A1-26334B4613BD}" type="slidenum">
+            <a:fld id="{07B9A03F-B064-404E-8677-51BF90BF94EA}" type="slidenum">
               <a:rPr lang="zh-CN" altLang="en-US" smtClean="0"/>
               <a:t>‹#›</a:t>
             </a:fld>
@@ -5571,7 +7357,7 @@
     </p:spTree>
     <p:extLst>
       <p:ext uri="{BB962C8B-B14F-4D97-AF65-F5344CB8AC3E}">
-        <p14:creationId xmlns:p14="http://schemas.microsoft.com/office/powerpoint/2010/main" val="2083185087"/>
+        <p14:creationId xmlns:p14="http://schemas.microsoft.com/office/powerpoint/2010/main" val="2518264995"/>
       </p:ext>
     </p:extLst>
   </p:cSld>
@@ -5608,7 +7394,7 @@
           <p:cNvPr id="2" name="标题占位符 1">
             <a:extLst>
               <a:ext uri="{FF2B5EF4-FFF2-40B4-BE49-F238E27FC236}">
-                <a16:creationId xmlns:a16="http://schemas.microsoft.com/office/drawing/2014/main" id="{E6BB5354-50A8-B9B3-FB60-8457C8790426}"/>
+                <a16:creationId xmlns:a16="http://schemas.microsoft.com/office/drawing/2014/main" id="{3CFB12A7-17F5-F119-CED3-777A6B93F15F}"/>
               </a:ext>
             </a:extLst>
           </p:cNvPr>
@@ -5646,7 +7432,7 @@
           <p:cNvPr id="3" name="文本占位符 2">
             <a:extLst>
               <a:ext uri="{FF2B5EF4-FFF2-40B4-BE49-F238E27FC236}">
-                <a16:creationId xmlns:a16="http://schemas.microsoft.com/office/drawing/2014/main" id="{ECC990EE-6B7B-77B4-7725-22515CFA809B}"/>
+                <a16:creationId xmlns:a16="http://schemas.microsoft.com/office/drawing/2014/main" id="{95089FB4-94AC-14CC-2701-BD7545FEF5A9}"/>
               </a:ext>
             </a:extLst>
           </p:cNvPr>
@@ -5713,7 +7499,7 @@
           <p:cNvPr id="4" name="日期占位符 3">
             <a:extLst>
               <a:ext uri="{FF2B5EF4-FFF2-40B4-BE49-F238E27FC236}">
-                <a16:creationId xmlns:a16="http://schemas.microsoft.com/office/drawing/2014/main" id="{07377A6F-0BFD-EDE1-B038-69F65A039C6A}"/>
+                <a16:creationId xmlns:a16="http://schemas.microsoft.com/office/drawing/2014/main" id="{7F1FBB7A-E335-88D8-368B-D85C814324AC}"/>
               </a:ext>
             </a:extLst>
           </p:cNvPr>
@@ -5747,7 +7533,7 @@
             </a:lvl1pPr>
           </a:lstStyle>
           <a:p>
-            <a:fld id="{14A68783-71C6-44C0-96E1-E0D80588316A}" type="datetimeFigureOut">
+            <a:fld id="{8FDC24A8-F9FD-4E6D-9262-B054C6511475}" type="datetimeFigureOut">
               <a:rPr lang="zh-CN" altLang="en-US" smtClean="0"/>
               <a:t>2026/10/14</a:t>
             </a:fld>
@@ -5760,7 +7546,7 @@
           <p:cNvPr id="5" name="页脚占位符 4">
             <a:extLst>
               <a:ext uri="{FF2B5EF4-FFF2-40B4-BE49-F238E27FC236}">
-                <a16:creationId xmlns:a16="http://schemas.microsoft.com/office/drawing/2014/main" id="{B58FB357-16A0-06DB-2B88-2E4C025CC1A5}"/>
+                <a16:creationId xmlns:a16="http://schemas.microsoft.com/office/drawing/2014/main" id="{920DECCB-14D0-D006-3034-AEF4A2160257}"/>
               </a:ext>
             </a:extLst>
           </p:cNvPr>
@@ -5803,7 +7589,7 @@
           <p:cNvPr id="6" name="灯片编号占位符 5">
             <a:extLst>
               <a:ext uri="{FF2B5EF4-FFF2-40B4-BE49-F238E27FC236}">
-                <a16:creationId xmlns:a16="http://schemas.microsoft.com/office/drawing/2014/main" id="{7C934483-8DA9-CCD2-D149-8C8EA9CA7507}"/>
+                <a16:creationId xmlns:a16="http://schemas.microsoft.com/office/drawing/2014/main" id="{2B7795B2-2B25-6536-38A2-9BB9AC608A96}"/>
               </a:ext>
             </a:extLst>
           </p:cNvPr>
@@ -5837,7 +7623,7 @@
             </a:lvl1pPr>
           </a:lstStyle>
           <a:p>
-            <a:fld id="{3C2DEA8F-B415-412B-82A1-26334B4613BD}" type="slidenum">
+            <a:fld id="{07B9A03F-B064-404E-8677-51BF90BF94EA}" type="slidenum">
               <a:rPr lang="zh-CN" altLang="en-US" smtClean="0"/>
               <a:t>‹#›</a:t>
             </a:fld>
@@ -5848,7 +7634,7 @@
     </p:spTree>
     <p:extLst>
       <p:ext uri="{BB962C8B-B14F-4D97-AF65-F5344CB8AC3E}">
-        <p14:creationId xmlns:p14="http://schemas.microsoft.com/office/powerpoint/2010/main" val="1743407876"/>
+        <p14:creationId xmlns:p14="http://schemas.microsoft.com/office/powerpoint/2010/main" val="2561135322"/>
       </p:ext>
     </p:extLst>
   </p:cSld>
@@ -6171,7 +7957,7 @@
           <p:cNvPr id="2" name="图表 1">
             <a:extLst>
               <a:ext uri="{FF2B5EF4-FFF2-40B4-BE49-F238E27FC236}">
-                <a16:creationId xmlns:a16="http://schemas.microsoft.com/office/drawing/2014/main" id="{031E8596-E1B5-8783-B744-A9C591BFF356}"/>
+                <a16:creationId xmlns:a16="http://schemas.microsoft.com/office/drawing/2014/main" id="{F8D676FE-3B6C-E45F-693A-9F6FF44ABDFB}"/>
               </a:ext>
             </a:extLst>
           </p:cNvPr>
@@ -6179,7 +7965,7 @@
           <p:nvPr>
             <p:extLst>
               <p:ext uri="{D42A27DB-BD31-4B8C-83A1-F6EECF244321}">
-                <p14:modId xmlns:p14="http://schemas.microsoft.com/office/powerpoint/2010/main" val="646956659"/>
+                <p14:modId xmlns:p14="http://schemas.microsoft.com/office/powerpoint/2010/main" val="1474350711"/>
               </p:ext>
             </p:extLst>
           </p:nvPr>
@@ -6199,7 +7985,7 @@
           <p:cNvPr id="3" name="图表 2">
             <a:extLst>
               <a:ext uri="{FF2B5EF4-FFF2-40B4-BE49-F238E27FC236}">
-                <a16:creationId xmlns:a16="http://schemas.microsoft.com/office/drawing/2014/main" id="{C3B8EDAD-5320-8480-FF36-D520AD2D4AAD}"/>
+                <a16:creationId xmlns:a16="http://schemas.microsoft.com/office/drawing/2014/main" id="{6DA09550-7A2B-EC0B-39FF-46DE92603D5F}"/>
               </a:ext>
             </a:extLst>
           </p:cNvPr>
@@ -6207,7 +7993,7 @@
           <p:nvPr>
             <p:extLst>
               <p:ext uri="{D42A27DB-BD31-4B8C-83A1-F6EECF244321}">
-                <p14:modId xmlns:p14="http://schemas.microsoft.com/office/powerpoint/2010/main" val="2429013283"/>
+                <p14:modId xmlns:p14="http://schemas.microsoft.com/office/powerpoint/2010/main" val="316749534"/>
               </p:ext>
             </p:extLst>
           </p:nvPr>
@@ -6225,7 +8011,7 @@
     </p:spTree>
     <p:extLst>
       <p:ext uri="{BB962C8B-B14F-4D97-AF65-F5344CB8AC3E}">
-        <p14:creationId xmlns:p14="http://schemas.microsoft.com/office/powerpoint/2010/main" val="1500872289"/>
+        <p14:creationId xmlns:p14="http://schemas.microsoft.com/office/powerpoint/2010/main" val="462663090"/>
       </p:ext>
     </p:extLst>
   </p:cSld>
@@ -6257,7 +8043,7 @@
           <p:cNvPr id="2" name="图表 1">
             <a:extLst>
               <a:ext uri="{FF2B5EF4-FFF2-40B4-BE49-F238E27FC236}">
-                <a16:creationId xmlns:a16="http://schemas.microsoft.com/office/drawing/2014/main" id="{88F6E0F8-9D04-25FA-DF96-651D0722EE33}"/>
+                <a16:creationId xmlns:a16="http://schemas.microsoft.com/office/drawing/2014/main" id="{C1871E5E-EEFF-DB2F-1727-2DDB2C633215}"/>
               </a:ext>
             </a:extLst>
           </p:cNvPr>
@@ -6265,7 +8051,93 @@
           <p:nvPr>
             <p:extLst>
               <p:ext uri="{D42A27DB-BD31-4B8C-83A1-F6EECF244321}">
-                <p14:modId xmlns:p14="http://schemas.microsoft.com/office/powerpoint/2010/main" val="2706342498"/>
+                <p14:modId xmlns:p14="http://schemas.microsoft.com/office/powerpoint/2010/main" val="2716637103"/>
+              </p:ext>
+            </p:extLst>
+          </p:nvPr>
+        </p:nvGraphicFramePr>
+        <p:xfrm>
+          <a:off x="254000" y="508000"/>
+          <a:ext cx="5715000" cy="5588000"/>
+        </p:xfrm>
+        <a:graphic>
+          <a:graphicData uri="http://schemas.openxmlformats.org/drawingml/2006/chart">
+            <c:chart xmlns:c="http://schemas.openxmlformats.org/drawingml/2006/chart" xmlns:r="http://schemas.openxmlformats.org/officeDocument/2006/relationships" r:id="rId2"/>
+          </a:graphicData>
+        </a:graphic>
+      </p:graphicFrame>
+      <p:graphicFrame>
+        <p:nvGraphicFramePr>
+          <p:cNvPr id="3" name="图表 2">
+            <a:extLst>
+              <a:ext uri="{FF2B5EF4-FFF2-40B4-BE49-F238E27FC236}">
+                <a16:creationId xmlns:a16="http://schemas.microsoft.com/office/drawing/2014/main" id="{ADE2C674-AC87-62F1-D546-1902DFD11F0F}"/>
+              </a:ext>
+            </a:extLst>
+          </p:cNvPr>
+          <p:cNvGraphicFramePr/>
+          <p:nvPr>
+            <p:extLst>
+              <p:ext uri="{D42A27DB-BD31-4B8C-83A1-F6EECF244321}">
+                <p14:modId xmlns:p14="http://schemas.microsoft.com/office/powerpoint/2010/main" val="1115432391"/>
+              </p:ext>
+            </p:extLst>
+          </p:nvPr>
+        </p:nvGraphicFramePr>
+        <p:xfrm>
+          <a:off x="6223000" y="508000"/>
+          <a:ext cx="5715000" cy="5588000"/>
+        </p:xfrm>
+        <a:graphic>
+          <a:graphicData uri="http://schemas.openxmlformats.org/drawingml/2006/chart">
+            <c:chart xmlns:c="http://schemas.openxmlformats.org/drawingml/2006/chart" xmlns:r="http://schemas.openxmlformats.org/officeDocument/2006/relationships" r:id="rId3"/>
+          </a:graphicData>
+        </a:graphic>
+      </p:graphicFrame>
+    </p:spTree>
+    <p:extLst>
+      <p:ext uri="{BB962C8B-B14F-4D97-AF65-F5344CB8AC3E}">
+        <p14:creationId xmlns:p14="http://schemas.microsoft.com/office/powerpoint/2010/main" val="1831614684"/>
+      </p:ext>
+    </p:extLst>
+  </p:cSld>
+  <p:clrMapOvr>
+    <a:masterClrMapping/>
+  </p:clrMapOvr>
+</p:sld>
+</file>
+
+<file path=ppt/slides/slide3.xml><?xml version="1.0" encoding="utf-8"?>
+<p:sld xmlns:a="http://schemas.openxmlformats.org/drawingml/2006/main" xmlns:r="http://schemas.openxmlformats.org/officeDocument/2006/relationships" xmlns:p="http://schemas.openxmlformats.org/presentationml/2006/main">
+  <p:cSld>
+    <p:spTree>
+      <p:nvGrpSpPr>
+        <p:cNvPr id="1" name=""/>
+        <p:cNvGrpSpPr/>
+        <p:nvPr/>
+      </p:nvGrpSpPr>
+      <p:grpSpPr>
+        <a:xfrm>
+          <a:off x="0" y="0"/>
+          <a:ext cx="0" cy="0"/>
+          <a:chOff x="0" y="0"/>
+          <a:chExt cx="0" cy="0"/>
+        </a:xfrm>
+      </p:grpSpPr>
+      <p:graphicFrame>
+        <p:nvGraphicFramePr>
+          <p:cNvPr id="2" name="图表 1">
+            <a:extLst>
+              <a:ext uri="{FF2B5EF4-FFF2-40B4-BE49-F238E27FC236}">
+                <a16:creationId xmlns:a16="http://schemas.microsoft.com/office/drawing/2014/main" id="{873030D3-7F67-46DD-D0D5-877E062C884F}"/>
+              </a:ext>
+            </a:extLst>
+          </p:cNvPr>
+          <p:cNvGraphicFramePr/>
+          <p:nvPr>
+            <p:extLst>
+              <p:ext uri="{D42A27DB-BD31-4B8C-83A1-F6EECF244321}">
+                <p14:modId xmlns:p14="http://schemas.microsoft.com/office/powerpoint/2010/main" val="3040174791"/>
               </p:ext>
             </p:extLst>
           </p:nvPr>
@@ -6283,7 +8155,7 @@
     </p:spTree>
     <p:extLst>
       <p:ext uri="{BB962C8B-B14F-4D97-AF65-F5344CB8AC3E}">
-        <p14:creationId xmlns:p14="http://schemas.microsoft.com/office/powerpoint/2010/main" val="3670549888"/>
+        <p14:creationId xmlns:p14="http://schemas.microsoft.com/office/powerpoint/2010/main" val="2228310174"/>
       </p:ext>
     </p:extLst>
   </p:cSld>
